--- a/Y9_Exploring_Science/9B_Plant_growth/9B_L06_Farming_problems_and_the_carbon_cycle.pptx
+++ b/Y9_Exploring_Science/9B_Plant_growth/9B_L06_Farming_problems_and_the_carbon_cycle.pptx
@@ -1829,7 +1829,7 @@
         <p:spPr>
           <a:xfrm>
             <a:off x="548640" y="3657600"/>
-            <a:ext cx="10515600" cy="914400"/>
+            <a:ext cx="10515600" cy="1097280"/>
           </a:xfrm>
           <a:prstGeom prst="rect">
             <a:avLst/>
@@ -1842,7 +1842,7 @@
           <a:lstStyle>
             <a:lvl1pPr indent="0" marL="0">
               <a:buNone/>
-              <a:defRPr lang="en-US" sz="2000" dirty="0">
+              <a:defRPr lang="en-US" sz="2400" dirty="0">
                 <a:solidFill>
                   <a:srgbClr val="FFFFFF"/>
                 </a:solidFill>
@@ -1853,7 +1853,7 @@
             <a:pPr indent="0" marL="0">
               <a:buNone/>
             </a:pPr>
-            <a:endParaRPr lang="en-US" sz="2000" dirty="0"/>
+            <a:endParaRPr lang="en-US" sz="2400" dirty="0"/>
           </a:p>
         </p:txBody>
       </p:sp>
@@ -1953,14 +1953,14 @@
               <a:buNone/>
             </a:pPr>
             <a:r>
-              <a:rPr lang="en-US" sz="900" dirty="0">
+              <a:rPr lang="en-US" sz="1000" dirty="0">
                 <a:solidFill>
                   <a:srgbClr val="5B6574"/>
                 </a:solidFill>
               </a:rPr>
               <a:t>Year 9 Science  |  9B Plant growth  |  Lesson 6: Farming problems and the carbon cycle</a:t>
             </a:r>
-            <a:endParaRPr lang="en-US" sz="900" dirty="0"/>
+            <a:endParaRPr lang="en-US" sz="1000" dirty="0"/>
           </a:p>
         </p:txBody>
       </p:sp>
@@ -2129,14 +2129,14 @@
               <a:buNone/>
             </a:pPr>
             <a:r>
-              <a:rPr lang="en-US" sz="900" dirty="0">
+              <a:rPr lang="en-US" sz="1000" dirty="0">
                 <a:solidFill>
                   <a:srgbClr val="5B6574"/>
                 </a:solidFill>
               </a:rPr>
               <a:t>Year 9 Science  |  9B Plant growth  |  Lesson 6: Farming problems and the carbon cycle</a:t>
             </a:r>
-            <a:endParaRPr lang="en-US" sz="900" dirty="0"/>
+            <a:endParaRPr lang="en-US" sz="1000" dirty="0"/>
           </a:p>
         </p:txBody>
       </p:sp>
@@ -2305,14 +2305,14 @@
               <a:buNone/>
             </a:pPr>
             <a:r>
-              <a:rPr lang="en-US" sz="900" dirty="0">
+              <a:rPr lang="en-US" sz="1000" dirty="0">
                 <a:solidFill>
                   <a:srgbClr val="5B6574"/>
                 </a:solidFill>
               </a:rPr>
               <a:t>Year 9 Science  |  9B Plant growth  |  Lesson 6: Farming problems and the carbon cycle</a:t>
             </a:r>
-            <a:endParaRPr lang="en-US" sz="900" dirty="0"/>
+            <a:endParaRPr lang="en-US" sz="1000" dirty="0"/>
           </a:p>
         </p:txBody>
       </p:sp>
@@ -2441,7 +2441,7 @@
           <a:lstStyle>
             <a:lvl1pPr indent="0" marL="0">
               <a:buNone/>
-              <a:defRPr lang="en-US" sz="3000" b="1" dirty="0">
+              <a:defRPr lang="en-US" sz="3400" b="1" dirty="0">
                 <a:solidFill>
                   <a:srgbClr val="3A2E00"/>
                 </a:solidFill>
@@ -2452,7 +2452,7 @@
             <a:pPr indent="0" marL="0">
               <a:buNone/>
             </a:pPr>
-            <a:endParaRPr lang="en-US" sz="3000" dirty="0"/>
+            <a:endParaRPr lang="en-US" sz="3400" dirty="0"/>
           </a:p>
         </p:txBody>
       </p:sp>
@@ -2869,14 +2869,14 @@
               <a:buNone/>
             </a:pPr>
             <a:r>
-              <a:rPr lang="en-US" sz="1300" b="1" spc="200" kern="0" dirty="0">
+              <a:rPr lang="en-US" sz="1400" b="1" spc="200" kern="0" dirty="0">
                 <a:solidFill>
                   <a:srgbClr val="F2CE3E"/>
                 </a:solidFill>
               </a:rPr>
               <a:t>YEAR 9 SCIENCE  ·  9B PLANT GROWTH  ·  LESSON 6 OF 7</a:t>
             </a:r>
-            <a:endParaRPr lang="en-US" sz="1300" dirty="0"/>
+            <a:endParaRPr lang="en-US" sz="1400" dirty="0"/>
           </a:p>
         </p:txBody>
       </p:sp>
@@ -2929,7 +2929,7 @@
         <p:spPr>
           <a:xfrm>
             <a:off x="548640" y="3657600"/>
-            <a:ext cx="10515600" cy="914400"/>
+            <a:ext cx="10515600" cy="1097280"/>
           </a:xfrm>
           <a:prstGeom prst="rect">
             <a:avLst/>
@@ -2945,14 +2945,14 @@
               <a:buNone/>
             </a:pPr>
             <a:r>
-              <a:rPr lang="en-US" sz="2000" dirty="0">
+              <a:rPr lang="en-US" sz="2400" dirty="0">
                 <a:solidFill>
                   <a:srgbClr val="FFFFFF"/>
                 </a:solidFill>
               </a:rPr>
               <a:t>If fertilisers and pesticides raise the yield, what is the cost?</a:t>
             </a:r>
-            <a:endParaRPr lang="en-US" sz="2000" dirty="0"/>
+            <a:endParaRPr lang="en-US" sz="2400" dirty="0"/>
           </a:p>
         </p:txBody>
       </p:sp>
@@ -2981,14 +2981,14 @@
               <a:buNone/>
             </a:pPr>
             <a:r>
-              <a:rPr lang="en-US" sz="1200" dirty="0">
+              <a:rPr lang="en-US" sz="1400" dirty="0">
                 <a:solidFill>
                   <a:srgbClr val="C9D3E6"/>
                 </a:solidFill>
               </a:rPr>
               <a:t>Exploring Science International 9  ·  Student Book pages 32 to 33  ·  Workbook pages 23 to 24</a:t>
             </a:r>
-            <a:endParaRPr lang="en-US" sz="1200" dirty="0"/>
+            <a:endParaRPr lang="en-US" sz="1400" dirty="0"/>
           </a:p>
         </p:txBody>
       </p:sp>
@@ -3167,14 +3167,14 @@
               <a:buNone/>
             </a:pPr>
             <a:r>
-              <a:rPr lang="en-US" sz="1400" i="1" dirty="0">
+              <a:rPr lang="en-US" sz="1600" i="1" dirty="0">
                 <a:solidFill>
                   <a:srgbClr val="5B6574"/>
                 </a:solidFill>
               </a:rPr>
               <a:t>Mini whiteboards. One answer each, then we check.</a:t>
             </a:r>
-            <a:endParaRPr lang="en-US" sz="1400" dirty="0"/>
+            <a:endParaRPr lang="en-US" sz="1600" dirty="0"/>
           </a:p>
         </p:txBody>
       </p:sp>
@@ -3223,16 +3223,14 @@
           <a:ln/>
         </p:spPr>
         <p:txBody>
-          <a:bodyPr wrap="square" lIns="0" tIns="0" rIns="0" bIns="0" rtlCol="0" anchor="ctr">
-            <a:normAutofit/>
-          </a:bodyPr>
+          <a:bodyPr wrap="square" lIns="0" tIns="0" rIns="0" bIns="0" rtlCol="0" anchor="ctr"/>
           <a:lstStyle/>
           <a:p>
             <a:pPr indent="0" marL="0">
               <a:buNone/>
             </a:pPr>
             <a:r>
-              <a:rPr lang="en-US" sz="1600" b="1" dirty="0">
+              <a:rPr lang="en-US" sz="2000" b="1" dirty="0">
                 <a:solidFill>
                   <a:srgbClr val="7B3A8E"/>
                 </a:solidFill>
@@ -3243,14 +3241,14 @@
               <a:buNone/>
             </a:pPr>
             <a:r>
-              <a:rPr lang="en-US" sz="1600" dirty="0">
+              <a:rPr lang="en-US" sz="2000" dirty="0">
                 <a:solidFill>
                   <a:srgbClr val="141B26"/>
                 </a:solidFill>
               </a:rPr>
               <a:t>Which organisms use up the oxygen in a lake after an algal bloom?</a:t>
             </a:r>
-            <a:endParaRPr lang="en-US" sz="1600" dirty="0"/>
+            <a:endParaRPr lang="en-US" sz="2000" dirty="0"/>
           </a:p>
         </p:txBody>
       </p:sp>
@@ -3299,16 +3297,14 @@
           <a:ln/>
         </p:spPr>
         <p:txBody>
-          <a:bodyPr wrap="square" lIns="0" tIns="0" rIns="0" bIns="0" rtlCol="0" anchor="ctr">
-            <a:normAutofit/>
-          </a:bodyPr>
+          <a:bodyPr wrap="square" lIns="0" tIns="0" rIns="0" bIns="0" rtlCol="0" anchor="ctr"/>
           <a:lstStyle/>
           <a:p>
             <a:pPr indent="0" marL="0">
               <a:buNone/>
             </a:pPr>
             <a:r>
-              <a:rPr lang="en-US" sz="1600" b="1" dirty="0">
+              <a:rPr lang="en-US" sz="2000" b="1" dirty="0">
                 <a:solidFill>
                   <a:srgbClr val="7B3A8E"/>
                 </a:solidFill>
@@ -3319,14 +3315,14 @@
               <a:buNone/>
             </a:pPr>
             <a:r>
-              <a:rPr lang="en-US" sz="1600" dirty="0">
+              <a:rPr lang="en-US" sz="2000" dirty="0">
                 <a:solidFill>
                   <a:srgbClr val="141B26"/>
                 </a:solidFill>
               </a:rPr>
               <a:t>What does persistent mean for a pesticide?</a:t>
             </a:r>
-            <a:endParaRPr lang="en-US" sz="1600" dirty="0"/>
+            <a:endParaRPr lang="en-US" sz="2000" dirty="0"/>
           </a:p>
         </p:txBody>
       </p:sp>
@@ -3375,16 +3371,14 @@
           <a:ln/>
         </p:spPr>
         <p:txBody>
-          <a:bodyPr wrap="square" lIns="0" tIns="0" rIns="0" bIns="0" rtlCol="0" anchor="ctr">
-            <a:normAutofit/>
-          </a:bodyPr>
+          <a:bodyPr wrap="square" lIns="0" tIns="0" rIns="0" bIns="0" rtlCol="0" anchor="ctr"/>
           <a:lstStyle/>
           <a:p>
             <a:pPr indent="0" marL="0">
               <a:buNone/>
             </a:pPr>
             <a:r>
-              <a:rPr lang="en-US" sz="1600" b="1" dirty="0">
+              <a:rPr lang="en-US" sz="2000" b="1" dirty="0">
                 <a:solidFill>
                   <a:srgbClr val="7B3A8E"/>
                 </a:solidFill>
@@ -3395,14 +3389,14 @@
               <a:buNone/>
             </a:pPr>
             <a:r>
-              <a:rPr lang="en-US" sz="1600" dirty="0">
+              <a:rPr lang="en-US" sz="2000" dirty="0">
                 <a:solidFill>
                   <a:srgbClr val="141B26"/>
                 </a:solidFill>
               </a:rPr>
               <a:t>Which process removes carbon dioxide from the air?</a:t>
             </a:r>
-            <a:endParaRPr lang="en-US" sz="1600" dirty="0"/>
+            <a:endParaRPr lang="en-US" sz="2000" dirty="0"/>
           </a:p>
         </p:txBody>
       </p:sp>
@@ -3451,16 +3445,14 @@
           <a:ln/>
         </p:spPr>
         <p:txBody>
-          <a:bodyPr wrap="square" lIns="0" tIns="0" rIns="0" bIns="0" rtlCol="0" anchor="ctr">
-            <a:normAutofit/>
-          </a:bodyPr>
+          <a:bodyPr wrap="square" lIns="0" tIns="0" rIns="0" bIns="0" rtlCol="0" anchor="ctr"/>
           <a:lstStyle/>
           <a:p>
             <a:pPr indent="0" marL="0">
               <a:buNone/>
             </a:pPr>
             <a:r>
-              <a:rPr lang="en-US" sz="1600" b="1" dirty="0">
+              <a:rPr lang="en-US" sz="2000" b="1" dirty="0">
                 <a:solidFill>
                   <a:srgbClr val="7B3A8E"/>
                 </a:solidFill>
@@ -3471,14 +3463,14 @@
               <a:buNone/>
             </a:pPr>
             <a:r>
-              <a:rPr lang="en-US" sz="1600" dirty="0">
+              <a:rPr lang="en-US" sz="2000" dirty="0">
                 <a:solidFill>
                   <a:srgbClr val="141B26"/>
                 </a:solidFill>
               </a:rPr>
               <a:t>Name two processes that release carbon dioxide into the air.</a:t>
             </a:r>
-            <a:endParaRPr lang="en-US" sz="1600" dirty="0"/>
+            <a:endParaRPr lang="en-US" sz="2000" dirty="0"/>
           </a:p>
         </p:txBody>
       </p:sp>
@@ -3527,16 +3519,14 @@
           <a:ln/>
         </p:spPr>
         <p:txBody>
-          <a:bodyPr wrap="square" lIns="0" tIns="0" rIns="0" bIns="0" rtlCol="0" anchor="ctr">
-            <a:normAutofit/>
-          </a:bodyPr>
+          <a:bodyPr wrap="square" lIns="0" tIns="0" rIns="0" bIns="0" rtlCol="0" anchor="ctr"/>
           <a:lstStyle/>
           <a:p>
             <a:pPr indent="0" marL="0">
               <a:buNone/>
             </a:pPr>
             <a:r>
-              <a:rPr lang="en-US" sz="1600" b="1" dirty="0">
+              <a:rPr lang="en-US" sz="2000" b="1" dirty="0">
                 <a:solidFill>
                   <a:srgbClr val="7B3A8E"/>
                 </a:solidFill>
@@ -3547,14 +3537,14 @@
               <a:buNone/>
             </a:pPr>
             <a:r>
-              <a:rPr lang="en-US" sz="1600" dirty="0">
+              <a:rPr lang="en-US" sz="2000" dirty="0">
                 <a:solidFill>
                   <a:srgbClr val="141B26"/>
                 </a:solidFill>
               </a:rPr>
               <a:t>Why is planting one variety over a huge area risky?</a:t>
             </a:r>
-            <a:endParaRPr lang="en-US" sz="1600" dirty="0"/>
+            <a:endParaRPr lang="en-US" sz="2000" dirty="0"/>
           </a:p>
         </p:txBody>
       </p:sp>
@@ -3883,23 +3873,21 @@
           <a:ln/>
         </p:spPr>
         <p:txBody>
-          <a:bodyPr wrap="square" lIns="0" tIns="0" rIns="0" bIns="0" rtlCol="0" anchor="t">
-            <a:normAutofit/>
-          </a:bodyPr>
+          <a:bodyPr wrap="square" lIns="0" tIns="0" rIns="0" bIns="0" rtlCol="0" anchor="t"/>
           <a:lstStyle/>
           <a:p>
             <a:pPr indent="0" marL="0">
               <a:buNone/>
             </a:pPr>
             <a:r>
-              <a:rPr lang="en-US" sz="1700" dirty="0">
+              <a:rPr lang="en-US" sz="2000" dirty="0">
                 <a:solidFill>
                   <a:srgbClr val="141B26"/>
                 </a:solidFill>
               </a:rPr>
               <a:t>Core: number the eutrophication steps, predict the changes in the hedge food web, match the carbon cycle processes.</a:t>
             </a:r>
-            <a:endParaRPr lang="en-US" sz="1700" dirty="0"/>
+            <a:endParaRPr lang="en-US" sz="2000" dirty="0"/>
           </a:p>
         </p:txBody>
       </p:sp>
@@ -3982,23 +3970,21 @@
           <a:ln/>
         </p:spPr>
         <p:txBody>
-          <a:bodyPr wrap="square" lIns="0" tIns="0" rIns="0" bIns="0" rtlCol="0" anchor="t">
-            <a:normAutofit/>
-          </a:bodyPr>
+          <a:bodyPr wrap="square" lIns="0" tIns="0" rIns="0" bIns="0" rtlCol="0" anchor="t"/>
           <a:lstStyle/>
           <a:p>
             <a:pPr indent="0" marL="0">
               <a:buNone/>
             </a:pPr>
             <a:r>
-              <a:rPr lang="en-US" sz="1700" dirty="0">
+              <a:rPr lang="en-US" sz="2000" dirty="0">
                 <a:solidFill>
                   <a:srgbClr val="141B26"/>
                 </a:solidFill>
               </a:rPr>
               <a:t>Stretch: bacteria and fish; nitrates and algae; deforestation and carbon dioxide.</a:t>
             </a:r>
-            <a:endParaRPr lang="en-US" sz="1700" dirty="0"/>
+            <a:endParaRPr lang="en-US" sz="2000" dirty="0"/>
           </a:p>
         </p:txBody>
       </p:sp>
@@ -4081,23 +4067,21 @@
           <a:ln/>
         </p:spPr>
         <p:txBody>
-          <a:bodyPr wrap="square" lIns="0" tIns="0" rIns="0" bIns="0" rtlCol="0" anchor="t">
-            <a:normAutofit/>
-          </a:bodyPr>
+          <a:bodyPr wrap="square" lIns="0" tIns="0" rIns="0" bIns="0" rtlCol="0" anchor="t"/>
           <a:lstStyle/>
           <a:p>
             <a:pPr indent="0" marL="0">
               <a:buNone/>
             </a:pPr>
             <a:r>
-              <a:rPr lang="en-US" sz="1700" dirty="0">
+              <a:rPr lang="en-US" sz="2000" dirty="0">
                 <a:solidFill>
                   <a:srgbClr val="141B26"/>
                 </a:solidFill>
               </a:rPr>
               <a:t>Challenge: the Irish potato famine; bioaccumulation and the neonicotinoid ban.</a:t>
             </a:r>
-            <a:endParaRPr lang="en-US" sz="1700" dirty="0"/>
+            <a:endParaRPr lang="en-US" sz="2000" dirty="0"/>
           </a:p>
         </p:txBody>
       </p:sp>
@@ -4180,23 +4164,21 @@
           <a:ln/>
         </p:spPr>
         <p:txBody>
-          <a:bodyPr wrap="square" lIns="0" tIns="0" rIns="0" bIns="0" rtlCol="0" anchor="t">
-            <a:normAutofit/>
-          </a:bodyPr>
+          <a:bodyPr wrap="square" lIns="0" tIns="0" rIns="0" bIns="0" rtlCol="0" anchor="t"/>
           <a:lstStyle/>
           <a:p>
             <a:pPr indent="0" marL="0">
               <a:buNone/>
             </a:pPr>
             <a:r>
-              <a:rPr lang="en-US" sz="1700" dirty="0">
+              <a:rPr lang="en-US" sz="2000" dirty="0">
                 <a:solidFill>
                   <a:srgbClr val="141B26"/>
                 </a:solidFill>
               </a:rPr>
               <a:t>Finished? The My thinking question is about cement.</a:t>
             </a:r>
-            <a:endParaRPr lang="en-US" sz="1700" dirty="0"/>
+            <a:endParaRPr lang="en-US" sz="2000" dirty="0"/>
           </a:p>
         </p:txBody>
       </p:sp>
@@ -4225,14 +4207,14 @@
               <a:buNone/>
             </a:pPr>
             <a:r>
-              <a:rPr lang="en-US" sz="1300" i="1" dirty="0">
+              <a:rPr lang="en-US" sz="1500" i="1" dirty="0">
                 <a:solidFill>
                   <a:srgbClr val="5B6574"/>
                 </a:solidFill>
               </a:rPr>
               <a:t>Every explanation should be a chain: this happens, so this happens, so this happens.</a:t>
             </a:r>
-            <a:endParaRPr lang="en-US" sz="1300" dirty="0"/>
+            <a:endParaRPr lang="en-US" sz="1500" dirty="0"/>
           </a:p>
         </p:txBody>
       </p:sp>
@@ -4425,23 +4407,21 @@
           <a:ln/>
         </p:spPr>
         <p:txBody>
-          <a:bodyPr wrap="square" lIns="0" tIns="0" rIns="0" bIns="0" rtlCol="0" anchor="t">
-            <a:normAutofit/>
-          </a:bodyPr>
+          <a:bodyPr wrap="square" lIns="0" tIns="0" rIns="0" bIns="0" rtlCol="0" anchor="t"/>
           <a:lstStyle/>
           <a:p>
             <a:pPr indent="0" marL="0">
               <a:buNone/>
             </a:pPr>
             <a:r>
-              <a:rPr lang="en-US" sz="2200" b="1" dirty="0">
+              <a:rPr lang="en-US" sz="2600" b="1" dirty="0">
                 <a:solidFill>
                   <a:srgbClr val="0F2A5F"/>
                 </a:solidFill>
               </a:rPr>
               <a:t>Fertilisers raise yields and feed people, but they can wash into rivers. Should farmers stop using them? Give one point for each side, then decide.</a:t>
             </a:r>
-            <a:endParaRPr lang="en-US" sz="2200" dirty="0"/>
+            <a:endParaRPr lang="en-US" sz="2600" dirty="0"/>
           </a:p>
         </p:txBody>
       </p:sp>
@@ -4490,9 +4470,7 @@
           <a:ln/>
         </p:spPr>
         <p:txBody>
-          <a:bodyPr wrap="square" lIns="0" tIns="0" rIns="0" bIns="0" rtlCol="0" anchor="t">
-            <a:normAutofit/>
-          </a:bodyPr>
+          <a:bodyPr wrap="square" lIns="0" tIns="0" rIns="0" bIns="0" rtlCol="0" anchor="t"/>
           <a:lstStyle/>
           <a:p>
             <a:pPr indent="0" marL="0">
@@ -4502,14 +4480,14 @@
               <a:buNone/>
             </a:pPr>
             <a:r>
-              <a:rPr lang="en-US" sz="1500" b="1" dirty="0">
+              <a:rPr lang="en-US" sz="1800" b="1" dirty="0">
                 <a:solidFill>
                   <a:srgbClr val="7B3A8E"/>
                 </a:solidFill>
               </a:rPr>
               <a:t>Sentence frames</a:t>
             </a:r>
-            <a:endParaRPr lang="en-US" sz="1500" dirty="0"/>
+            <a:endParaRPr lang="en-US" sz="1800" dirty="0"/>
           </a:p>
           <a:p>
             <a:pPr indent="0" marL="0">
@@ -4519,14 +4497,14 @@
               <a:buNone/>
             </a:pPr>
             <a:r>
-              <a:rPr lang="en-US" sz="1500" dirty="0">
+              <a:rPr lang="en-US" sz="1800" dirty="0">
                 <a:solidFill>
                   <a:srgbClr val="141B26"/>
                 </a:solidFill>
               </a:rPr>
               <a:t>One reason to keep using fertilisers is ___.</a:t>
             </a:r>
-            <a:endParaRPr lang="en-US" sz="1500" dirty="0"/>
+            <a:endParaRPr lang="en-US" sz="1800" dirty="0"/>
           </a:p>
           <a:p>
             <a:pPr indent="0" marL="0">
@@ -4536,14 +4514,14 @@
               <a:buNone/>
             </a:pPr>
             <a:r>
-              <a:rPr lang="en-US" sz="1500" dirty="0">
+              <a:rPr lang="en-US" sz="1800" dirty="0">
                 <a:solidFill>
                   <a:srgbClr val="141B26"/>
                 </a:solidFill>
               </a:rPr>
               <a:t>One problem is ___, because ___.</a:t>
             </a:r>
-            <a:endParaRPr lang="en-US" sz="1500" dirty="0"/>
+            <a:endParaRPr lang="en-US" sz="1800" dirty="0"/>
           </a:p>
           <a:p>
             <a:pPr indent="0" marL="0">
@@ -4553,14 +4531,14 @@
               <a:buNone/>
             </a:pPr>
             <a:r>
-              <a:rPr lang="en-US" sz="1500" dirty="0">
+              <a:rPr lang="en-US" sz="1800" dirty="0">
                 <a:solidFill>
                   <a:srgbClr val="141B26"/>
                 </a:solidFill>
               </a:rPr>
               <a:t>A sustainable solution could be ___.</a:t>
             </a:r>
-            <a:endParaRPr lang="en-US" sz="1500" dirty="0"/>
+            <a:endParaRPr lang="en-US" sz="1800" dirty="0"/>
           </a:p>
         </p:txBody>
       </p:sp>
@@ -4760,14 +4738,14 @@
               <a:buNone/>
             </a:pPr>
             <a:r>
-              <a:rPr lang="en-US" sz="1400" i="1" dirty="0">
+              <a:rPr lang="en-US" sz="1600" i="1" dirty="0">
                 <a:solidFill>
                   <a:srgbClr val="5B6574"/>
                 </a:solidFill>
               </a:rPr>
               <a:t>On your worksheet exit ticket. Work alone. Hand it in as you leave.</a:t>
             </a:r>
-            <a:endParaRPr lang="en-US" sz="1400" dirty="0"/>
+            <a:endParaRPr lang="en-US" sz="1600" dirty="0"/>
           </a:p>
         </p:txBody>
       </p:sp>
@@ -4780,25 +4758,23 @@
         <p:spPr>
           <a:xfrm>
             <a:off x="548640" y="1828800"/>
-            <a:ext cx="10881360" cy="1188720"/>
-          </a:xfrm>
-          <a:prstGeom prst="rect">
-            <a:avLst/>
-          </a:prstGeom>
-          <a:noFill/>
-          <a:ln/>
-        </p:spPr>
-        <p:txBody>
-          <a:bodyPr wrap="square" lIns="0" tIns="0" rIns="0" bIns="0" rtlCol="0" anchor="t">
-            <a:normAutofit/>
-          </a:bodyPr>
+            <a:ext cx="9692640" cy="1188720"/>
+          </a:xfrm>
+          <a:prstGeom prst="rect">
+            <a:avLst/>
+          </a:prstGeom>
+          <a:noFill/>
+          <a:ln/>
+        </p:spPr>
+        <p:txBody>
+          <a:bodyPr wrap="square" lIns="0" tIns="0" rIns="0" bIns="0" rtlCol="0" anchor="t"/>
           <a:lstStyle/>
           <a:p>
             <a:pPr indent="0" marL="0">
               <a:buNone/>
             </a:pPr>
             <a:r>
-              <a:rPr lang="en-US" sz="1800" b="1" dirty="0">
+              <a:rPr lang="en-US" sz="2200" b="1" dirty="0">
                 <a:solidFill>
                   <a:srgbClr val="7B3A8E"/>
                 </a:solidFill>
@@ -4809,14 +4785,14 @@
               <a:buNone/>
             </a:pPr>
             <a:r>
-              <a:rPr lang="en-US" sz="1800" dirty="0">
+              <a:rPr lang="en-US" sz="2200" dirty="0">
                 <a:solidFill>
                   <a:srgbClr val="141B26"/>
                 </a:solidFill>
               </a:rPr>
               <a:t>What does eutrophication mean?</a:t>
             </a:r>
-            <a:endParaRPr lang="en-US" sz="1800" dirty="0"/>
+            <a:endParaRPr lang="en-US" sz="2200" dirty="0"/>
           </a:p>
         </p:txBody>
       </p:sp>
@@ -4829,25 +4805,23 @@
         <p:spPr>
           <a:xfrm>
             <a:off x="548640" y="3017520"/>
-            <a:ext cx="10881360" cy="1188720"/>
-          </a:xfrm>
-          <a:prstGeom prst="rect">
-            <a:avLst/>
-          </a:prstGeom>
-          <a:noFill/>
-          <a:ln/>
-        </p:spPr>
-        <p:txBody>
-          <a:bodyPr wrap="square" lIns="0" tIns="0" rIns="0" bIns="0" rtlCol="0" anchor="t">
-            <a:normAutofit/>
-          </a:bodyPr>
+            <a:ext cx="9692640" cy="1188720"/>
+          </a:xfrm>
+          <a:prstGeom prst="rect">
+            <a:avLst/>
+          </a:prstGeom>
+          <a:noFill/>
+          <a:ln/>
+        </p:spPr>
+        <p:txBody>
+          <a:bodyPr wrap="square" lIns="0" tIns="0" rIns="0" bIns="0" rtlCol="0" anchor="t"/>
           <a:lstStyle/>
           <a:p>
             <a:pPr indent="0" marL="0">
               <a:buNone/>
             </a:pPr>
             <a:r>
-              <a:rPr lang="en-US" sz="1800" b="1" dirty="0">
+              <a:rPr lang="en-US" sz="2200" b="1" dirty="0">
                 <a:solidFill>
                   <a:srgbClr val="7B3A8E"/>
                 </a:solidFill>
@@ -4858,14 +4832,14 @@
               <a:buNone/>
             </a:pPr>
             <a:r>
-              <a:rPr lang="en-US" sz="1800" dirty="0">
+              <a:rPr lang="en-US" sz="2200" dirty="0">
                 <a:solidFill>
                   <a:srgbClr val="141B26"/>
                 </a:solidFill>
               </a:rPr>
               <a:t>Name two processes that release carbon dioxide into the air.</a:t>
             </a:r>
-            <a:endParaRPr lang="en-US" sz="1800" dirty="0"/>
+            <a:endParaRPr lang="en-US" sz="2200" dirty="0"/>
           </a:p>
         </p:txBody>
       </p:sp>
@@ -4878,25 +4852,23 @@
         <p:spPr>
           <a:xfrm>
             <a:off x="548640" y="4206240"/>
-            <a:ext cx="10881360" cy="1188720"/>
-          </a:xfrm>
-          <a:prstGeom prst="rect">
-            <a:avLst/>
-          </a:prstGeom>
-          <a:noFill/>
-          <a:ln/>
-        </p:spPr>
-        <p:txBody>
-          <a:bodyPr wrap="square" lIns="0" tIns="0" rIns="0" bIns="0" rtlCol="0" anchor="t">
-            <a:normAutofit/>
-          </a:bodyPr>
+            <a:ext cx="9692640" cy="1188720"/>
+          </a:xfrm>
+          <a:prstGeom prst="rect">
+            <a:avLst/>
+          </a:prstGeom>
+          <a:noFill/>
+          <a:ln/>
+        </p:spPr>
+        <p:txBody>
+          <a:bodyPr wrap="square" lIns="0" tIns="0" rIns="0" bIns="0" rtlCol="0" anchor="t"/>
           <a:lstStyle/>
           <a:p>
             <a:pPr indent="0" marL="0">
               <a:buNone/>
             </a:pPr>
             <a:r>
-              <a:rPr lang="en-US" sz="1800" b="1" dirty="0">
+              <a:rPr lang="en-US" sz="2200" b="1" dirty="0">
                 <a:solidFill>
                   <a:srgbClr val="7B3A8E"/>
                 </a:solidFill>
@@ -4907,14 +4879,14 @@
               <a:buNone/>
             </a:pPr>
             <a:r>
-              <a:rPr lang="en-US" sz="1800" dirty="0">
+              <a:rPr lang="en-US" sz="2200" dirty="0">
                 <a:solidFill>
                   <a:srgbClr val="141B26"/>
                 </a:solidFill>
               </a:rPr>
               <a:t>Why is it risky to plant one variety of crop over a very large area?</a:t>
             </a:r>
-            <a:endParaRPr lang="en-US" sz="1800" dirty="0"/>
+            <a:endParaRPr lang="en-US" sz="2200" dirty="0"/>
           </a:p>
         </p:txBody>
       </p:sp>
@@ -5173,108 +5145,106 @@
         <p:spPr>
           <a:xfrm>
             <a:off x="548640" y="1371600"/>
-            <a:ext cx="10881360" cy="4480560"/>
-          </a:xfrm>
-          <a:prstGeom prst="rect">
-            <a:avLst/>
-          </a:prstGeom>
-          <a:noFill/>
-          <a:ln/>
-        </p:spPr>
-        <p:txBody>
-          <a:bodyPr wrap="square" lIns="0" tIns="0" rIns="0" bIns="0" rtlCol="0" anchor="t">
-            <a:normAutofit/>
-          </a:bodyPr>
+            <a:ext cx="10881360" cy="4114800"/>
+          </a:xfrm>
+          <a:prstGeom prst="rect">
+            <a:avLst/>
+          </a:prstGeom>
+          <a:noFill/>
+          <a:ln/>
+        </p:spPr>
+        <p:txBody>
+          <a:bodyPr wrap="square" lIns="0" tIns="0" rIns="0" bIns="0" rtlCol="0" anchor="t"/>
           <a:lstStyle/>
           <a:p>
             <a:pPr marL="342900" indent="-342900">
               <a:spcAft>
-                <a:spcPts val="1000"/>
+                <a:spcPts val="1200"/>
               </a:spcAft>
               <a:buSzPct val="100000"/>
               <a:buChar char="✓"/>
             </a:pPr>
             <a:r>
-              <a:rPr lang="en-US" sz="1700" dirty="0">
+              <a:rPr lang="en-US" sz="2000" dirty="0">
                 <a:solidFill>
                   <a:srgbClr val="141B26"/>
                 </a:solidFill>
               </a:rPr>
               <a:t>Fertiliser washed into water causes eutrophication: algae grow, plants die, decomposers use the oxygen, fish die.</a:t>
             </a:r>
-            <a:endParaRPr lang="en-US" sz="1700" dirty="0"/>
+            <a:endParaRPr lang="en-US" sz="2000" dirty="0"/>
           </a:p>
           <a:p>
             <a:pPr marL="342900" indent="-342900">
               <a:spcAft>
-                <a:spcPts val="1000"/>
+                <a:spcPts val="1200"/>
               </a:spcAft>
               <a:buSzPct val="100000"/>
               <a:buChar char="✓"/>
             </a:pPr>
             <a:r>
-              <a:rPr lang="en-US" sz="1700" dirty="0">
+              <a:rPr lang="en-US" sz="2000" dirty="0">
                 <a:solidFill>
                   <a:srgbClr val="141B26"/>
                 </a:solidFill>
               </a:rPr>
               <a:t>Persistent pesticides build up along food chains (bioaccumulation) and can kill pollinators and pest predators.</a:t>
             </a:r>
-            <a:endParaRPr lang="en-US" sz="1700" dirty="0"/>
+            <a:endParaRPr lang="en-US" sz="2000" dirty="0"/>
           </a:p>
           <a:p>
             <a:pPr marL="342900" indent="-342900">
               <a:spcAft>
-                <a:spcPts val="1000"/>
+                <a:spcPts val="1200"/>
               </a:spcAft>
               <a:buSzPct val="100000"/>
               <a:buChar char="✓"/>
             </a:pPr>
             <a:r>
-              <a:rPr lang="en-US" sz="1700" dirty="0">
+              <a:rPr lang="en-US" sz="2000" dirty="0">
                 <a:solidFill>
                   <a:srgbClr val="141B26"/>
                 </a:solidFill>
               </a:rPr>
               <a:t>Clearing land and growing single varieties reduce biodiversity and make food webs fragile.</a:t>
             </a:r>
-            <a:endParaRPr lang="en-US" sz="1700" dirty="0"/>
+            <a:endParaRPr lang="en-US" sz="2000" dirty="0"/>
           </a:p>
           <a:p>
             <a:pPr marL="342900" indent="-342900">
               <a:spcAft>
-                <a:spcPts val="1000"/>
+                <a:spcPts val="1200"/>
               </a:spcAft>
               <a:buSzPct val="100000"/>
               <a:buChar char="✓"/>
             </a:pPr>
             <a:r>
-              <a:rPr lang="en-US" sz="1700" dirty="0">
+              <a:rPr lang="en-US" sz="2000" dirty="0">
                 <a:solidFill>
                   <a:srgbClr val="141B26"/>
                 </a:solidFill>
               </a:rPr>
               <a:t>Photosynthesis removes carbon dioxide; respiration, decomposers and combustion return it. Fossil fuels and deforestation are raising it.</a:t>
             </a:r>
-            <a:endParaRPr lang="en-US" sz="1700" dirty="0"/>
+            <a:endParaRPr lang="en-US" sz="2000" dirty="0"/>
           </a:p>
           <a:p>
             <a:pPr marL="342900" indent="-342900">
               <a:spcAft>
-                <a:spcPts val="1000"/>
+                <a:spcPts val="1200"/>
               </a:spcAft>
               <a:buSzPct val="100000"/>
               <a:buChar char="✓"/>
             </a:pPr>
             <a:r>
-              <a:rPr lang="en-US" sz="1700" dirty="0">
+              <a:rPr lang="en-US" sz="2000" dirty="0">
                 <a:solidFill>
                   <a:srgbClr val="141B26"/>
                 </a:solidFill>
               </a:rPr>
               <a:t>Sustainable development means producing what we need without destroying habitats.</a:t>
             </a:r>
-            <a:endParaRPr lang="en-US" sz="1700" dirty="0"/>
+            <a:endParaRPr lang="en-US" sz="2000" dirty="0"/>
           </a:p>
         </p:txBody>
       </p:sp>
@@ -5303,7 +5273,7 @@
               <a:buNone/>
             </a:pPr>
             <a:r>
-              <a:rPr lang="en-US" sz="1300" b="1" dirty="0">
+              <a:rPr lang="en-US" sz="1500" b="1" dirty="0">
                 <a:solidFill>
                   <a:srgbClr val="7B3A8E"/>
                 </a:solidFill>
@@ -5314,14 +5284,14 @@
               <a:buNone/>
             </a:pPr>
             <a:r>
-              <a:rPr lang="en-US" sz="1300" dirty="0">
+              <a:rPr lang="en-US" sz="1500" dirty="0">
                 <a:solidFill>
                   <a:srgbClr val="141B26"/>
                 </a:solidFill>
               </a:rPr>
               <a:t>Bias and validity: can we trust a graph, and is organic farming better?</a:t>
             </a:r>
-            <a:endParaRPr lang="en-US" sz="1300" dirty="0"/>
+            <a:endParaRPr lang="en-US" sz="1500" dirty="0"/>
           </a:p>
         </p:txBody>
       </p:sp>
@@ -5589,60 +5559,58 @@
           <a:ln/>
         </p:spPr>
         <p:txBody>
-          <a:bodyPr wrap="square" lIns="0" tIns="0" rIns="0" bIns="0" rtlCol="0" anchor="t">
-            <a:normAutofit/>
-          </a:bodyPr>
+          <a:bodyPr wrap="square" lIns="0" tIns="0" rIns="0" bIns="0" rtlCol="0" anchor="t"/>
           <a:lstStyle/>
           <a:p>
             <a:pPr indent="0" marL="0">
               <a:spcAft>
-                <a:spcPts val="1000"/>
+                <a:spcPts val="1200"/>
               </a:spcAft>
               <a:buNone/>
             </a:pPr>
             <a:r>
-              <a:rPr lang="en-US" sz="2000" dirty="0">
+              <a:rPr lang="en-US" sz="2400" dirty="0">
                 <a:solidFill>
                   <a:srgbClr val="141B26"/>
                 </a:solidFill>
               </a:rPr>
               <a:t>1. What do fish need from the water for respiration?</a:t>
             </a:r>
-            <a:endParaRPr lang="en-US" sz="2000" dirty="0"/>
+            <a:endParaRPr lang="en-US" sz="2400" dirty="0"/>
           </a:p>
           <a:p>
             <a:pPr indent="0" marL="0">
               <a:spcAft>
-                <a:spcPts val="1000"/>
+                <a:spcPts val="1200"/>
               </a:spcAft>
               <a:buNone/>
             </a:pPr>
             <a:r>
-              <a:rPr lang="en-US" sz="2000" dirty="0">
+              <a:rPr lang="en-US" sz="2400" dirty="0">
                 <a:solidFill>
                   <a:srgbClr val="141B26"/>
                 </a:solidFill>
               </a:rPr>
               <a:t>2. Name one farm chemical that rain can wash into a river or lake.</a:t>
             </a:r>
-            <a:endParaRPr lang="en-US" sz="2000" dirty="0"/>
+            <a:endParaRPr lang="en-US" sz="2400" dirty="0"/>
           </a:p>
           <a:p>
             <a:pPr indent="0" marL="0">
               <a:spcAft>
-                <a:spcPts val="1000"/>
+                <a:spcPts val="1200"/>
               </a:spcAft>
               <a:buNone/>
             </a:pPr>
             <a:r>
-              <a:rPr lang="en-US" sz="2000" dirty="0">
+              <a:rPr lang="en-US" sz="2400" dirty="0">
                 <a:solidFill>
                   <a:srgbClr val="141B26"/>
                 </a:solidFill>
               </a:rPr>
               <a:t>3. Suggest how these fish died.</a:t>
             </a:r>
-            <a:endParaRPr lang="en-US" sz="2000" dirty="0"/>
+            <a:endParaRPr lang="en-US" sz="2400" dirty="0"/>
           </a:p>
         </p:txBody>
       </p:sp>
@@ -5679,7 +5647,7 @@
         <p:spPr>
           <a:xfrm>
             <a:off x="6858000" y="4503442"/>
-            <a:ext cx="4754880" cy="502920"/>
+            <a:ext cx="4754880" cy="548640"/>
           </a:xfrm>
           <a:prstGeom prst="rect">
             <a:avLst/>
@@ -5695,7 +5663,7 @@
               <a:buNone/>
             </a:pPr>
             <a:r>
-              <a:rPr lang="en-US" sz="1100" dirty="0">
+              <a:rPr lang="en-US" sz="1300" dirty="0">
                 <a:solidFill>
                   <a:srgbClr val="141B26"/>
                 </a:solidFill>
@@ -5705,21 +5673,21 @@
             <a:pPr algn="l" indent="0" marL="0">
               <a:buNone/>
             </a:pPr>
-            <a:endParaRPr lang="en-US" sz="1100" dirty="0"/>
+            <a:endParaRPr lang="en-US" sz="1300" dirty="0"/>
           </a:p>
           <a:p>
             <a:pPr algn="l" indent="0" marL="0">
               <a:buNone/>
             </a:pPr>
             <a:r>
-              <a:rPr lang="en-US" sz="800" dirty="0">
+              <a:rPr lang="en-US" sz="900" dirty="0">
                 <a:solidFill>
                   <a:srgbClr val="5B6574"/>
                 </a:solidFill>
               </a:rPr>
               <a:t>Image: eutrophication&amp;hypoxia, CC BY 2.0, via Wikimedia Commons</a:t>
             </a:r>
-            <a:endParaRPr lang="en-US" sz="1100" dirty="0"/>
+            <a:endParaRPr lang="en-US" sz="1300" dirty="0"/>
           </a:p>
         </p:txBody>
       </p:sp>
@@ -5902,8 +5870,8 @@
         </p:nvSpPr>
         <p:spPr>
           <a:xfrm>
-            <a:off x="548640" y="1325880"/>
-            <a:ext cx="5669280" cy="457200"/>
+            <a:off x="548640" y="1280160"/>
+            <a:ext cx="5486400" cy="411480"/>
           </a:xfrm>
           <a:prstGeom prst="rect">
             <a:avLst/>
@@ -5919,14 +5887,14 @@
               <a:buNone/>
             </a:pPr>
             <a:r>
-              <a:rPr lang="en-US" sz="2000" b="1" dirty="0">
+              <a:rPr lang="en-US" sz="2200" b="1" dirty="0">
                 <a:solidFill>
                   <a:srgbClr val="7B3A8E"/>
                 </a:solidFill>
               </a:rPr>
               <a:t>Today I can ...</a:t>
             </a:r>
-            <a:endParaRPr lang="en-US" sz="2000" dirty="0"/>
+            <a:endParaRPr lang="en-US" sz="2200" dirty="0"/>
           </a:p>
         </p:txBody>
       </p:sp>
@@ -5938,8 +5906,8 @@
         </p:nvSpPr>
         <p:spPr>
           <a:xfrm>
-            <a:off x="594360" y="1947672"/>
-            <a:ext cx="292608" cy="292608"/>
+            <a:off x="594360" y="1810512"/>
+            <a:ext cx="310896" cy="310896"/>
           </a:xfrm>
           <a:prstGeom prst="rect">
             <a:avLst/>
@@ -5963,33 +5931,31 @@
         </p:nvSpPr>
         <p:spPr>
           <a:xfrm>
-            <a:off x="1051560" y="1874520"/>
-            <a:ext cx="5120640" cy="868680"/>
-          </a:xfrm>
-          <a:prstGeom prst="rect">
-            <a:avLst/>
-          </a:prstGeom>
-          <a:noFill/>
-          <a:ln/>
-        </p:spPr>
-        <p:txBody>
-          <a:bodyPr wrap="square" lIns="0" tIns="0" rIns="0" bIns="0" rtlCol="0" anchor="t">
-            <a:normAutofit/>
-          </a:bodyPr>
+            <a:off x="1097280" y="1737360"/>
+            <a:ext cx="10332720" cy="868680"/>
+          </a:xfrm>
+          <a:prstGeom prst="rect">
+            <a:avLst/>
+          </a:prstGeom>
+          <a:noFill/>
+          <a:ln/>
+        </p:spPr>
+        <p:txBody>
+          <a:bodyPr wrap="square" lIns="0" tIns="0" rIns="0" bIns="0" rtlCol="0" anchor="t"/>
           <a:lstStyle/>
           <a:p>
             <a:pPr indent="0" marL="0">
               <a:buNone/>
             </a:pPr>
             <a:r>
-              <a:rPr lang="en-US" sz="1600" dirty="0">
+              <a:rPr lang="en-US" sz="2000" dirty="0">
                 <a:solidFill>
                   <a:srgbClr val="141B26"/>
                 </a:solidFill>
               </a:rPr>
               <a:t>I can explain how fertilisers, pesticides and clearing land can harm wild organisms, including eutrophication and bioaccumulation.</a:t>
             </a:r>
-            <a:endParaRPr lang="en-US" sz="1600" dirty="0"/>
+            <a:endParaRPr lang="en-US" sz="2000" dirty="0"/>
           </a:p>
         </p:txBody>
       </p:sp>
@@ -6001,8 +5967,8 @@
         </p:nvSpPr>
         <p:spPr>
           <a:xfrm>
-            <a:off x="594360" y="2907792"/>
-            <a:ext cx="292608" cy="292608"/>
+            <a:off x="594360" y="2679192"/>
+            <a:ext cx="310896" cy="310896"/>
           </a:xfrm>
           <a:prstGeom prst="rect">
             <a:avLst/>
@@ -6026,33 +5992,31 @@
         </p:nvSpPr>
         <p:spPr>
           <a:xfrm>
-            <a:off x="1051560" y="2834640"/>
-            <a:ext cx="5120640" cy="868680"/>
-          </a:xfrm>
-          <a:prstGeom prst="rect">
-            <a:avLst/>
-          </a:prstGeom>
-          <a:noFill/>
-          <a:ln/>
-        </p:spPr>
-        <p:txBody>
-          <a:bodyPr wrap="square" lIns="0" tIns="0" rIns="0" bIns="0" rtlCol="0" anchor="t">
-            <a:normAutofit/>
-          </a:bodyPr>
+            <a:off x="1097280" y="2606040"/>
+            <a:ext cx="10332720" cy="868680"/>
+          </a:xfrm>
+          <a:prstGeom prst="rect">
+            <a:avLst/>
+          </a:prstGeom>
+          <a:noFill/>
+          <a:ln/>
+        </p:spPr>
+        <p:txBody>
+          <a:bodyPr wrap="square" lIns="0" tIns="0" rIns="0" bIns="0" rtlCol="0" anchor="t"/>
           <a:lstStyle/>
           <a:p>
             <a:pPr indent="0" marL="0">
               <a:buNone/>
             </a:pPr>
             <a:r>
-              <a:rPr lang="en-US" sz="1600" dirty="0">
+              <a:rPr lang="en-US" sz="2000" dirty="0">
                 <a:solidFill>
                   <a:srgbClr val="141B26"/>
                 </a:solidFill>
               </a:rPr>
               <a:t>I can use the carbon cycle to explain how farming and burning fuels change the carbon dioxide in the air, and suggest ways to farm more sustainably.</a:t>
             </a:r>
-            <a:endParaRPr lang="en-US" sz="1600" dirty="0"/>
+            <a:endParaRPr lang="en-US" sz="2000" dirty="0"/>
           </a:p>
         </p:txBody>
       </p:sp>
@@ -6064,8 +6028,8 @@
         </p:nvSpPr>
         <p:spPr>
           <a:xfrm>
-            <a:off x="6583680" y="1325880"/>
-            <a:ext cx="5029200" cy="457200"/>
+            <a:off x="548640" y="3611880"/>
+            <a:ext cx="5486400" cy="411480"/>
           </a:xfrm>
           <a:prstGeom prst="rect">
             <a:avLst/>
@@ -6081,14 +6045,14 @@
               <a:buNone/>
             </a:pPr>
             <a:r>
-              <a:rPr lang="en-US" sz="2000" b="1" dirty="0">
+              <a:rPr lang="en-US" sz="2200" b="1" dirty="0">
                 <a:solidFill>
                   <a:srgbClr val="7B3A8E"/>
                 </a:solidFill>
               </a:rPr>
               <a:t>Key words today</a:t>
             </a:r>
-            <a:endParaRPr lang="en-US" sz="2000" dirty="0"/>
+            <a:endParaRPr lang="en-US" sz="2200" dirty="0"/>
           </a:p>
         </p:txBody>
       </p:sp>
@@ -6100,391 +6064,313 @@
         </p:nvSpPr>
         <p:spPr>
           <a:xfrm>
-            <a:off x="6583680" y="1874520"/>
-            <a:ext cx="5029200" cy="4023360"/>
-          </a:xfrm>
-          <a:prstGeom prst="rect">
-            <a:avLst/>
-          </a:prstGeom>
-          <a:noFill/>
-          <a:ln/>
-        </p:spPr>
-        <p:txBody>
-          <a:bodyPr wrap="square" lIns="0" tIns="0" rIns="0" bIns="0" rtlCol="0" anchor="t">
-            <a:normAutofit/>
-          </a:bodyPr>
+            <a:off x="548640" y="4069080"/>
+            <a:ext cx="3515258" cy="1920240"/>
+          </a:xfrm>
+          <a:prstGeom prst="rect">
+            <a:avLst/>
+          </a:prstGeom>
+          <a:noFill/>
+          <a:ln/>
+        </p:spPr>
+        <p:txBody>
+          <a:bodyPr wrap="square" lIns="0" tIns="0" rIns="0" bIns="0" rtlCol="0" anchor="t"/>
+          <a:lstStyle/>
+          <a:p>
+            <a:pPr marL="304800" indent="-304800">
+              <a:spcAft>
+                <a:spcPts val="600"/>
+              </a:spcAft>
+              <a:buSzPct val="100000"/>
+              <a:buChar char="•"/>
+            </a:pPr>
+            <a:r>
+              <a:rPr lang="en-US" sz="2100" b="1" dirty="0">
+                <a:solidFill>
+                  <a:srgbClr val="0F2A5F"/>
+                </a:solidFill>
+              </a:rPr>
+              <a:t>habitat</a:t>
+            </a:r>
+            <a:endParaRPr lang="en-US" sz="2100" dirty="0"/>
+          </a:p>
+          <a:p>
+            <a:pPr marL="304800" indent="-304800">
+              <a:spcAft>
+                <a:spcPts val="600"/>
+              </a:spcAft>
+              <a:buSzPct val="100000"/>
+              <a:buChar char="•"/>
+            </a:pPr>
+            <a:r>
+              <a:rPr lang="en-US" sz="2100" b="1" dirty="0">
+                <a:solidFill>
+                  <a:srgbClr val="0F2A5F"/>
+                </a:solidFill>
+              </a:rPr>
+              <a:t>eutrophication</a:t>
+            </a:r>
+            <a:endParaRPr lang="en-US" sz="2100" dirty="0"/>
+          </a:p>
+          <a:p>
+            <a:pPr marL="304800" indent="-304800">
+              <a:spcAft>
+                <a:spcPts val="600"/>
+              </a:spcAft>
+              <a:buSzPct val="100000"/>
+              <a:buChar char="•"/>
+            </a:pPr>
+            <a:r>
+              <a:rPr lang="en-US" sz="2100" b="1" dirty="0">
+                <a:solidFill>
+                  <a:srgbClr val="0F2A5F"/>
+                </a:solidFill>
+              </a:rPr>
+              <a:t>algae</a:t>
+            </a:r>
+            <a:endParaRPr lang="en-US" sz="2100" dirty="0"/>
+          </a:p>
+          <a:p>
+            <a:pPr marL="304800" indent="-304800">
+              <a:spcAft>
+                <a:spcPts val="600"/>
+              </a:spcAft>
+              <a:buSzPct val="100000"/>
+              <a:buChar char="•"/>
+            </a:pPr>
+            <a:r>
+              <a:rPr lang="en-US" sz="2100" b="1" dirty="0">
+                <a:solidFill>
+                  <a:srgbClr val="0F2A5F"/>
+                </a:solidFill>
+              </a:rPr>
+              <a:t>decomposer</a:t>
+            </a:r>
+            <a:endParaRPr lang="en-US" sz="2100" dirty="0"/>
+          </a:p>
+        </p:txBody>
+      </p:sp>
+      <p:sp>
+        <p:nvSpPr>
+          <p:cNvPr id="12" name="Text 10"/>
+          <p:cNvSpPr txBox="1"/>
+          <p:nvPr/>
+        </p:nvSpPr>
+        <p:spPr>
+          <a:xfrm>
+            <a:off x="4338218" y="4069080"/>
+            <a:ext cx="3515258" cy="1920240"/>
+          </a:xfrm>
+          <a:prstGeom prst="rect">
+            <a:avLst/>
+          </a:prstGeom>
+          <a:noFill/>
+          <a:ln/>
+        </p:spPr>
+        <p:txBody>
+          <a:bodyPr wrap="square" lIns="0" tIns="0" rIns="0" bIns="0" rtlCol="0" anchor="t"/>
+          <a:lstStyle/>
+          <a:p>
+            <a:pPr marL="304800" indent="-304800">
+              <a:spcAft>
+                <a:spcPts val="600"/>
+              </a:spcAft>
+              <a:buSzPct val="100000"/>
+              <a:buChar char="•"/>
+            </a:pPr>
+            <a:r>
+              <a:rPr lang="en-US" sz="2100" b="1" dirty="0">
+                <a:solidFill>
+                  <a:srgbClr val="0F2A5F"/>
+                </a:solidFill>
+              </a:rPr>
+              <a:t>persistent</a:t>
+            </a:r>
+            <a:endParaRPr lang="en-US" sz="2100" dirty="0"/>
+          </a:p>
+          <a:p>
+            <a:pPr marL="304800" indent="-304800">
+              <a:spcAft>
+                <a:spcPts val="600"/>
+              </a:spcAft>
+              <a:buSzPct val="100000"/>
+              <a:buChar char="•"/>
+            </a:pPr>
+            <a:r>
+              <a:rPr lang="en-US" sz="2100" b="1" dirty="0">
+                <a:solidFill>
+                  <a:srgbClr val="0F2A5F"/>
+                </a:solidFill>
+              </a:rPr>
+              <a:t>bioaccumulation</a:t>
+            </a:r>
+            <a:endParaRPr lang="en-US" sz="2100" dirty="0"/>
+          </a:p>
+          <a:p>
+            <a:pPr marL="304800" indent="-304800">
+              <a:spcAft>
+                <a:spcPts val="600"/>
+              </a:spcAft>
+              <a:buSzPct val="100000"/>
+              <a:buChar char="•"/>
+            </a:pPr>
+            <a:r>
+              <a:rPr lang="en-US" sz="2100" b="1" dirty="0">
+                <a:solidFill>
+                  <a:srgbClr val="0F2A5F"/>
+                </a:solidFill>
+              </a:rPr>
+              <a:t>food web</a:t>
+            </a:r>
+            <a:endParaRPr lang="en-US" sz="2100" dirty="0"/>
+          </a:p>
+          <a:p>
+            <a:pPr marL="304800" indent="-304800">
+              <a:spcAft>
+                <a:spcPts val="600"/>
+              </a:spcAft>
+              <a:buSzPct val="100000"/>
+              <a:buChar char="•"/>
+            </a:pPr>
+            <a:r>
+              <a:rPr lang="en-US" sz="2100" b="1" dirty="0">
+                <a:solidFill>
+                  <a:srgbClr val="0F2A5F"/>
+                </a:solidFill>
+              </a:rPr>
+              <a:t>biodiversity</a:t>
+            </a:r>
+            <a:endParaRPr lang="en-US" sz="2100" dirty="0"/>
+          </a:p>
+        </p:txBody>
+      </p:sp>
+      <p:sp>
+        <p:nvSpPr>
+          <p:cNvPr id="13" name="Text 11"/>
+          <p:cNvSpPr txBox="1"/>
+          <p:nvPr/>
+        </p:nvSpPr>
+        <p:spPr>
+          <a:xfrm>
+            <a:off x="8127797" y="4069080"/>
+            <a:ext cx="3515258" cy="1920240"/>
+          </a:xfrm>
+          <a:prstGeom prst="rect">
+            <a:avLst/>
+          </a:prstGeom>
+          <a:noFill/>
+          <a:ln/>
+        </p:spPr>
+        <p:txBody>
+          <a:bodyPr wrap="square" lIns="0" tIns="0" rIns="0" bIns="0" rtlCol="0" anchor="t"/>
+          <a:lstStyle/>
+          <a:p>
+            <a:pPr marL="304800" indent="-304800">
+              <a:spcAft>
+                <a:spcPts val="600"/>
+              </a:spcAft>
+              <a:buSzPct val="100000"/>
+              <a:buChar char="•"/>
+            </a:pPr>
+            <a:r>
+              <a:rPr lang="en-US" sz="2100" b="1" dirty="0">
+                <a:solidFill>
+                  <a:srgbClr val="0F2A5F"/>
+                </a:solidFill>
+              </a:rPr>
+              <a:t>carbon cycle</a:t>
+            </a:r>
+            <a:endParaRPr lang="en-US" sz="2100" dirty="0"/>
+          </a:p>
+          <a:p>
+            <a:pPr marL="304800" indent="-304800">
+              <a:spcAft>
+                <a:spcPts val="600"/>
+              </a:spcAft>
+              <a:buSzPct val="100000"/>
+              <a:buChar char="•"/>
+            </a:pPr>
+            <a:r>
+              <a:rPr lang="en-US" sz="2100" b="1" dirty="0">
+                <a:solidFill>
+                  <a:srgbClr val="0F2A5F"/>
+                </a:solidFill>
+              </a:rPr>
+              <a:t>combustion</a:t>
+            </a:r>
+            <a:endParaRPr lang="en-US" sz="2100" dirty="0"/>
+          </a:p>
+          <a:p>
+            <a:pPr marL="304800" indent="-304800">
+              <a:spcAft>
+                <a:spcPts val="600"/>
+              </a:spcAft>
+              <a:buSzPct val="100000"/>
+              <a:buChar char="•"/>
+            </a:pPr>
+            <a:r>
+              <a:rPr lang="en-US" sz="2100" b="1" dirty="0">
+                <a:solidFill>
+                  <a:srgbClr val="0F2A5F"/>
+                </a:solidFill>
+              </a:rPr>
+              <a:t>global warming</a:t>
+            </a:r>
+            <a:endParaRPr lang="en-US" sz="2100" dirty="0"/>
+          </a:p>
+          <a:p>
+            <a:pPr marL="304800" indent="-304800">
+              <a:spcAft>
+                <a:spcPts val="600"/>
+              </a:spcAft>
+              <a:buSzPct val="100000"/>
+              <a:buChar char="•"/>
+            </a:pPr>
+            <a:r>
+              <a:rPr lang="en-US" sz="2100" b="1" dirty="0">
+                <a:solidFill>
+                  <a:srgbClr val="0F2A5F"/>
+                </a:solidFill>
+              </a:rPr>
+              <a:t>sustainable development</a:t>
+            </a:r>
+            <a:endParaRPr lang="en-US" sz="2100" dirty="0"/>
+          </a:p>
+        </p:txBody>
+      </p:sp>
+      <p:sp>
+        <p:nvSpPr>
+          <p:cNvPr id="14" name="Text 12"/>
+          <p:cNvSpPr txBox="1"/>
+          <p:nvPr/>
+        </p:nvSpPr>
+        <p:spPr>
+          <a:xfrm>
+            <a:off x="548640" y="6035040"/>
+            <a:ext cx="10881360" cy="320040"/>
+          </a:xfrm>
+          <a:prstGeom prst="rect">
+            <a:avLst/>
+          </a:prstGeom>
+          <a:noFill/>
+          <a:ln/>
+        </p:spPr>
+        <p:txBody>
+          <a:bodyPr wrap="square" lIns="0" tIns="0" rIns="0" bIns="0" rtlCol="0" anchor="ctr"/>
           <a:lstStyle/>
           <a:p>
             <a:pPr indent="0" marL="0">
-              <a:spcAft>
-                <a:spcPts val="500"/>
-              </a:spcAft>
-              <a:buNone/>
-            </a:pPr>
-            <a:r>
-              <a:rPr lang="en-US" sz="1300" b="1" dirty="0">
-                <a:solidFill>
-                  <a:srgbClr val="0F2A5F"/>
-                </a:solidFill>
-              </a:rPr>
-              <a:t>habitat</a:t>
-            </a:r>
-            <a:pPr indent="0" marL="0">
-              <a:spcAft>
-                <a:spcPts val="500"/>
-              </a:spcAft>
-              <a:buNone/>
-            </a:pPr>
-            <a:r>
-              <a:rPr lang="en-US" sz="1300" dirty="0">
-                <a:solidFill>
-                  <a:srgbClr val="141B26"/>
-                </a:solidFill>
-              </a:rPr>
-              <a:t>  the place where an organism lives</a:t>
-            </a:r>
-            <a:endParaRPr lang="en-US" sz="1300" dirty="0"/>
-          </a:p>
-          <a:p>
-            <a:pPr indent="0" marL="0">
-              <a:spcAft>
-                <a:spcPts val="500"/>
-              </a:spcAft>
-              <a:buNone/>
-            </a:pPr>
-            <a:r>
-              <a:rPr lang="en-US" sz="1300" b="1" dirty="0">
-                <a:solidFill>
-                  <a:srgbClr val="0F2A5F"/>
-                </a:solidFill>
-              </a:rPr>
-              <a:t>eutrophication</a:t>
-            </a:r>
-            <a:pPr indent="0" marL="0">
-              <a:spcAft>
-                <a:spcPts val="500"/>
-              </a:spcAft>
-              <a:buNone/>
-            </a:pPr>
-            <a:r>
-              <a:rPr lang="en-US" sz="1300" dirty="0">
-                <a:solidFill>
-                  <a:srgbClr val="141B26"/>
-                </a:solidFill>
-              </a:rPr>
-              <a:t>  a very rich supply of nutrients in water, which leads to fast plant growth and then death of fish</a:t>
-            </a:r>
-            <a:endParaRPr lang="en-US" sz="1300" dirty="0"/>
-          </a:p>
-          <a:p>
-            <a:pPr indent="0" marL="0">
-              <a:spcAft>
-                <a:spcPts val="500"/>
-              </a:spcAft>
-              <a:buNone/>
-            </a:pPr>
-            <a:r>
-              <a:rPr lang="en-US" sz="1300" b="1" dirty="0">
-                <a:solidFill>
-                  <a:srgbClr val="0F2A5F"/>
-                </a:solidFill>
-              </a:rPr>
-              <a:t>algae</a:t>
-            </a:r>
-            <a:pPr indent="0" marL="0">
-              <a:spcAft>
-                <a:spcPts val="500"/>
-              </a:spcAft>
-              <a:buNone/>
-            </a:pPr>
-            <a:r>
-              <a:rPr lang="en-US" sz="1300" dirty="0">
-                <a:solidFill>
-                  <a:srgbClr val="141B26"/>
-                </a:solidFill>
-              </a:rPr>
-              <a:t>  simple plant-like organisms that photosynthesise in water</a:t>
-            </a:r>
-            <a:endParaRPr lang="en-US" sz="1300" dirty="0"/>
-          </a:p>
-          <a:p>
-            <a:pPr indent="0" marL="0">
-              <a:spcAft>
-                <a:spcPts val="500"/>
-              </a:spcAft>
-              <a:buNone/>
-            </a:pPr>
-            <a:r>
-              <a:rPr lang="en-US" sz="1300" b="1" dirty="0">
-                <a:solidFill>
-                  <a:srgbClr val="0F2A5F"/>
-                </a:solidFill>
-              </a:rPr>
-              <a:t>decomposer</a:t>
-            </a:r>
-            <a:pPr indent="0" marL="0">
-              <a:spcAft>
-                <a:spcPts val="500"/>
-              </a:spcAft>
-              <a:buNone/>
-            </a:pPr>
-            <a:r>
-              <a:rPr lang="en-US" sz="1300" dirty="0">
-                <a:solidFill>
-                  <a:srgbClr val="141B26"/>
-                </a:solidFill>
-              </a:rPr>
-              <a:t>  a microorganism that breaks down dead material, using oxygen</a:t>
-            </a:r>
-            <a:endParaRPr lang="en-US" sz="1300" dirty="0"/>
-          </a:p>
-          <a:p>
-            <a:pPr indent="0" marL="0">
-              <a:spcAft>
-                <a:spcPts val="500"/>
-              </a:spcAft>
-              <a:buNone/>
-            </a:pPr>
-            <a:r>
-              <a:rPr lang="en-US" sz="1300" b="1" dirty="0">
-                <a:solidFill>
-                  <a:srgbClr val="0F2A5F"/>
-                </a:solidFill>
-              </a:rPr>
-              <a:t>persistent</a:t>
-            </a:r>
-            <a:pPr indent="0" marL="0">
-              <a:spcAft>
-                <a:spcPts val="500"/>
-              </a:spcAft>
-              <a:buNone/>
-            </a:pPr>
-            <a:r>
-              <a:rPr lang="en-US" sz="1300" dirty="0">
-                <a:solidFill>
-                  <a:srgbClr val="141B26"/>
-                </a:solidFill>
-              </a:rPr>
-              <a:t>  does not break down in the environment</a:t>
-            </a:r>
-            <a:endParaRPr lang="en-US" sz="1300" dirty="0"/>
-          </a:p>
-          <a:p>
-            <a:pPr indent="0" marL="0">
-              <a:spcAft>
-                <a:spcPts val="500"/>
-              </a:spcAft>
-              <a:buNone/>
-            </a:pPr>
-            <a:r>
-              <a:rPr lang="en-US" sz="1300" b="1" dirty="0">
-                <a:solidFill>
-                  <a:srgbClr val="0F2A5F"/>
-                </a:solidFill>
-              </a:rPr>
-              <a:t>bioaccumulation</a:t>
-            </a:r>
-            <a:pPr indent="0" marL="0">
-              <a:spcAft>
-                <a:spcPts val="500"/>
-              </a:spcAft>
-              <a:buNone/>
-            </a:pPr>
-            <a:r>
-              <a:rPr lang="en-US" sz="1300" dirty="0">
-                <a:solidFill>
-                  <a:srgbClr val="141B26"/>
-                </a:solidFill>
-              </a:rPr>
-              <a:t>  the build-up of a substance in organisms along a food chain</a:t>
-            </a:r>
-            <a:endParaRPr lang="en-US" sz="1300" dirty="0"/>
-          </a:p>
-          <a:p>
-            <a:pPr indent="0" marL="0">
-              <a:spcAft>
-                <a:spcPts val="500"/>
-              </a:spcAft>
-              <a:buNone/>
-            </a:pPr>
-            <a:r>
-              <a:rPr lang="en-US" sz="1300" b="1" dirty="0">
-                <a:solidFill>
-                  <a:srgbClr val="0F2A5F"/>
-                </a:solidFill>
-              </a:rPr>
-              <a:t>food web</a:t>
-            </a:r>
-            <a:pPr indent="0" marL="0">
-              <a:spcAft>
-                <a:spcPts val="500"/>
-              </a:spcAft>
-              <a:buNone/>
-            </a:pPr>
-            <a:r>
-              <a:rPr lang="en-US" sz="1300" dirty="0">
-                <a:solidFill>
-                  <a:srgbClr val="141B26"/>
-                </a:solidFill>
-              </a:rPr>
-              <a:t>  a diagram of linked food chains showing what eats what</a:t>
-            </a:r>
-            <a:endParaRPr lang="en-US" sz="1300" dirty="0"/>
-          </a:p>
-          <a:p>
-            <a:pPr indent="0" marL="0">
-              <a:spcAft>
-                <a:spcPts val="500"/>
-              </a:spcAft>
-              <a:buNone/>
-            </a:pPr>
-            <a:r>
-              <a:rPr lang="en-US" sz="1300" b="1" dirty="0">
-                <a:solidFill>
-                  <a:srgbClr val="0F2A5F"/>
-                </a:solidFill>
-              </a:rPr>
-              <a:t>biodiversity</a:t>
-            </a:r>
-            <a:pPr indent="0" marL="0">
-              <a:spcAft>
-                <a:spcPts val="500"/>
-              </a:spcAft>
-              <a:buNone/>
-            </a:pPr>
-            <a:r>
-              <a:rPr lang="en-US" sz="1300" dirty="0">
-                <a:solidFill>
-                  <a:srgbClr val="141B26"/>
-                </a:solidFill>
-              </a:rPr>
-              <a:t>  the number of different species in an area</a:t>
-            </a:r>
-            <a:endParaRPr lang="en-US" sz="1300" dirty="0"/>
-          </a:p>
-          <a:p>
-            <a:pPr indent="0" marL="0">
-              <a:spcAft>
-                <a:spcPts val="500"/>
-              </a:spcAft>
-              <a:buNone/>
-            </a:pPr>
-            <a:r>
-              <a:rPr lang="en-US" sz="1300" b="1" dirty="0">
-                <a:solidFill>
-                  <a:srgbClr val="0F2A5F"/>
-                </a:solidFill>
-              </a:rPr>
-              <a:t>carbon cycle</a:t>
-            </a:r>
-            <a:pPr indent="0" marL="0">
-              <a:spcAft>
-                <a:spcPts val="500"/>
-              </a:spcAft>
-              <a:buNone/>
-            </a:pPr>
-            <a:r>
-              <a:rPr lang="en-US" sz="1300" dirty="0">
-                <a:solidFill>
-                  <a:srgbClr val="141B26"/>
-                </a:solidFill>
-              </a:rPr>
-              <a:t>  the processes that move carbon between the air, living things and the Earth</a:t>
-            </a:r>
-            <a:endParaRPr lang="en-US" sz="1300" dirty="0"/>
-          </a:p>
-          <a:p>
-            <a:pPr indent="0" marL="0">
-              <a:spcAft>
-                <a:spcPts val="500"/>
-              </a:spcAft>
-              <a:buNone/>
-            </a:pPr>
-            <a:r>
-              <a:rPr lang="en-US" sz="1300" b="1" dirty="0">
-                <a:solidFill>
-                  <a:srgbClr val="0F2A5F"/>
-                </a:solidFill>
-              </a:rPr>
-              <a:t>combustion</a:t>
-            </a:r>
-            <a:pPr indent="0" marL="0">
-              <a:spcAft>
-                <a:spcPts val="500"/>
-              </a:spcAft>
-              <a:buNone/>
-            </a:pPr>
-            <a:r>
-              <a:rPr lang="en-US" sz="1300" dirty="0">
-                <a:solidFill>
-                  <a:srgbClr val="141B26"/>
-                </a:solidFill>
-              </a:rPr>
-              <a:t>  burning, which releases carbon dioxide</a:t>
-            </a:r>
-            <a:endParaRPr lang="en-US" sz="1300" dirty="0"/>
-          </a:p>
-          <a:p>
-            <a:pPr indent="0" marL="0">
-              <a:spcAft>
-                <a:spcPts val="500"/>
-              </a:spcAft>
-              <a:buNone/>
-            </a:pPr>
-            <a:r>
-              <a:rPr lang="en-US" sz="1300" b="1" dirty="0">
-                <a:solidFill>
-                  <a:srgbClr val="0F2A5F"/>
-                </a:solidFill>
-              </a:rPr>
-              <a:t>global warming</a:t>
-            </a:r>
-            <a:pPr indent="0" marL="0">
-              <a:spcAft>
-                <a:spcPts val="500"/>
-              </a:spcAft>
-              <a:buNone/>
-            </a:pPr>
-            <a:r>
-              <a:rPr lang="en-US" sz="1300" dirty="0">
-                <a:solidFill>
-                  <a:srgbClr val="141B26"/>
-                </a:solidFill>
-              </a:rPr>
-              <a:t>  the rise in the Earth's average temperature</a:t>
-            </a:r>
-            <a:endParaRPr lang="en-US" sz="1300" dirty="0"/>
-          </a:p>
-          <a:p>
-            <a:pPr indent="0" marL="0">
-              <a:spcAft>
-                <a:spcPts val="500"/>
-              </a:spcAft>
-              <a:buNone/>
-            </a:pPr>
-            <a:r>
-              <a:rPr lang="en-US" sz="1300" b="1" dirty="0">
-                <a:solidFill>
-                  <a:srgbClr val="0F2A5F"/>
-                </a:solidFill>
-              </a:rPr>
-              <a:t>sustainable development</a:t>
-            </a:r>
-            <a:pPr indent="0" marL="0">
-              <a:spcAft>
-                <a:spcPts val="500"/>
-              </a:spcAft>
-              <a:buNone/>
-            </a:pPr>
-            <a:r>
-              <a:rPr lang="en-US" sz="1300" dirty="0">
-                <a:solidFill>
-                  <a:srgbClr val="141B26"/>
-                </a:solidFill>
-              </a:rPr>
-              <a:t>  making the things we need without destroying habitats for the future</a:t>
-            </a:r>
-            <a:endParaRPr lang="en-US" sz="1300" dirty="0"/>
+              <a:buNone/>
+            </a:pPr>
+            <a:r>
+              <a:rPr lang="en-US" sz="1400" i="1" dirty="0">
+                <a:solidFill>
+                  <a:srgbClr val="5B6574"/>
+                </a:solidFill>
+              </a:rPr>
+              <a:t>Meanings are in the key words box on your worksheet.</a:t>
+            </a:r>
+            <a:endParaRPr lang="en-US" sz="1400" dirty="0"/>
           </a:p>
         </p:txBody>
       </p:sp>
@@ -6668,32 +6554,30 @@
         <p:spPr>
           <a:xfrm>
             <a:off x="548640" y="1371600"/>
-            <a:ext cx="5394960" cy="2377440"/>
-          </a:xfrm>
-          <a:prstGeom prst="rect">
-            <a:avLst/>
-          </a:prstGeom>
-          <a:noFill/>
-          <a:ln/>
-        </p:spPr>
-        <p:txBody>
-          <a:bodyPr wrap="square" lIns="0" tIns="0" rIns="0" bIns="0" rtlCol="0" anchor="t">
-            <a:normAutofit/>
-          </a:bodyPr>
+            <a:ext cx="5394960" cy="2651760"/>
+          </a:xfrm>
+          <a:prstGeom prst="rect">
+            <a:avLst/>
+          </a:prstGeom>
+          <a:noFill/>
+          <a:ln/>
+        </p:spPr>
+        <p:txBody>
+          <a:bodyPr wrap="square" lIns="0" tIns="0" rIns="0" bIns="0" rtlCol="0" anchor="t"/>
           <a:lstStyle/>
           <a:p>
             <a:pPr indent="0" marL="0">
               <a:buNone/>
             </a:pPr>
             <a:r>
-              <a:rPr lang="en-US" sz="2800" b="1" dirty="0">
+              <a:rPr lang="en-US" sz="2900" b="1" dirty="0">
                 <a:solidFill>
                   <a:srgbClr val="0F2A5F"/>
                 </a:solidFill>
               </a:rPr>
               <a:t>After a wet spring, a pond next to a farm turned bright green. Within two weeks the fish were dead. Nobody poisoned the pond. What happened?</a:t>
             </a:r>
-            <a:endParaRPr lang="en-US" sz="2800" dirty="0"/>
+            <a:endParaRPr lang="en-US" sz="2900" dirty="0"/>
           </a:p>
         </p:txBody>
       </p:sp>
@@ -6705,19 +6589,17 @@
         </p:nvSpPr>
         <p:spPr>
           <a:xfrm>
-            <a:off x="548640" y="3794760"/>
-            <a:ext cx="5394960" cy="2103120"/>
-          </a:xfrm>
-          <a:prstGeom prst="rect">
-            <a:avLst/>
-          </a:prstGeom>
-          <a:noFill/>
-          <a:ln/>
-        </p:spPr>
-        <p:txBody>
-          <a:bodyPr wrap="square" lIns="0" tIns="0" rIns="0" bIns="0" rtlCol="0" anchor="t">
-            <a:normAutofit/>
-          </a:bodyPr>
+            <a:off x="548640" y="4114800"/>
+            <a:ext cx="5394960" cy="1828800"/>
+          </a:xfrm>
+          <a:prstGeom prst="rect">
+            <a:avLst/>
+          </a:prstGeom>
+          <a:noFill/>
+          <a:ln/>
+        </p:spPr>
+        <p:txBody>
+          <a:bodyPr wrap="square" lIns="0" tIns="0" rIns="0" bIns="0" rtlCol="0" anchor="t"/>
           <a:lstStyle/>
           <a:p>
             <a:pPr indent="0" marL="0">
@@ -6727,14 +6609,14 @@
               <a:buNone/>
             </a:pPr>
             <a:r>
-              <a:rPr lang="en-US" sz="1600" dirty="0">
+              <a:rPr lang="en-US" sz="2000" dirty="0">
                 <a:solidFill>
                   <a:srgbClr val="141B26"/>
                 </a:solidFill>
               </a:rPr>
               <a:t>Talk to a partner: what made the water green, and why would that kill fish?</a:t>
             </a:r>
-            <a:endParaRPr lang="en-US" sz="1600" dirty="0"/>
+            <a:endParaRPr lang="en-US" sz="2000" dirty="0"/>
           </a:p>
         </p:txBody>
       </p:sp>
@@ -6771,7 +6653,7 @@
         <p:spPr>
           <a:xfrm>
             <a:off x="6309360" y="5417820"/>
-            <a:ext cx="5303520" cy="502920"/>
+            <a:ext cx="5303520" cy="548640"/>
           </a:xfrm>
           <a:prstGeom prst="rect">
             <a:avLst/>
@@ -6787,7 +6669,7 @@
               <a:buNone/>
             </a:pPr>
             <a:r>
-              <a:rPr lang="en-US" sz="1100" dirty="0">
+              <a:rPr lang="en-US" sz="1300" dirty="0">
                 <a:solidFill>
                   <a:srgbClr val="141B26"/>
                 </a:solidFill>
@@ -6797,21 +6679,21 @@
             <a:pPr algn="l" indent="0" marL="0">
               <a:buNone/>
             </a:pPr>
-            <a:endParaRPr lang="en-US" sz="1100" dirty="0"/>
+            <a:endParaRPr lang="en-US" sz="1300" dirty="0"/>
           </a:p>
           <a:p>
             <a:pPr algn="l" indent="0" marL="0">
               <a:buNone/>
             </a:pPr>
             <a:r>
-              <a:rPr lang="en-US" sz="800" dirty="0">
+              <a:rPr lang="en-US" sz="900" dirty="0">
                 <a:solidFill>
                   <a:srgbClr val="5B6574"/>
                 </a:solidFill>
               </a:rPr>
               <a:t>Image: suavehouse113, CC BY 2.0, via Wikimedia Commons</a:t>
             </a:r>
-            <a:endParaRPr lang="en-US" sz="1100" dirty="0"/>
+            <a:endParaRPr lang="en-US" sz="1300" dirty="0"/>
           </a:p>
         </p:txBody>
       </p:sp>
@@ -6994,8 +6876,8 @@
         </p:nvSpPr>
         <p:spPr>
           <a:xfrm>
-            <a:off x="548640" y="6053328"/>
-            <a:ext cx="9601200" cy="292608"/>
+            <a:off x="548640" y="6035040"/>
+            <a:ext cx="9601200" cy="310896"/>
           </a:xfrm>
           <a:prstGeom prst="rect">
             <a:avLst/>
@@ -7011,7 +6893,7 @@
               <a:buNone/>
             </a:pPr>
             <a:r>
-              <a:rPr lang="en-US" sz="1200" b="1" dirty="0">
+              <a:rPr lang="en-US" sz="1400" b="1" dirty="0">
                 <a:solidFill>
                   <a:srgbClr val="7B3A8E"/>
                 </a:solidFill>
@@ -7022,14 +6904,14 @@
               <a:buNone/>
             </a:pPr>
             <a:r>
-              <a:rPr lang="en-US" sz="1200" dirty="0">
+              <a:rPr lang="en-US" sz="1400" dirty="0">
                 <a:solidFill>
                   <a:srgbClr val="7B3A8E"/>
                 </a:solidFill>
               </a:rPr>
               <a:t>eutrophication   ·   algae   ·   decomposer</a:t>
             </a:r>
-            <a:endParaRPr lang="en-US" sz="1200" dirty="0"/>
+            <a:endParaRPr lang="en-US" sz="1400" dirty="0"/>
           </a:p>
         </p:txBody>
       </p:sp>
@@ -7136,16 +7018,14 @@
           <a:ln/>
         </p:spPr>
         <p:txBody>
-          <a:bodyPr wrap="square" lIns="0" tIns="0" rIns="0" bIns="0" rtlCol="0" anchor="ctr">
-            <a:normAutofit/>
-          </a:bodyPr>
+          <a:bodyPr wrap="square" lIns="0" tIns="0" rIns="0" bIns="0" rtlCol="0" anchor="ctr"/>
           <a:lstStyle/>
           <a:p>
             <a:pPr indent="0" marL="0">
               <a:buNone/>
             </a:pPr>
             <a:r>
-              <a:rPr lang="en-US" sz="1400" b="1" dirty="0">
+              <a:rPr lang="en-US" sz="1700" b="1" dirty="0">
                 <a:solidFill>
                   <a:srgbClr val="7B3A8E"/>
                 </a:solidFill>
@@ -7156,14 +7036,14 @@
               <a:buNone/>
             </a:pPr>
             <a:r>
-              <a:rPr lang="en-US" sz="1400" dirty="0">
+              <a:rPr lang="en-US" sz="1700" dirty="0">
                 <a:solidFill>
                   <a:srgbClr val="141B26"/>
                 </a:solidFill>
               </a:rPr>
               <a:t>Fertiliser feeds the algae; the decomposers that break down the dead plants use up the oxygen; the fish suffocate.</a:t>
             </a:r>
-            <a:endParaRPr lang="en-US" sz="1400" dirty="0"/>
+            <a:endParaRPr lang="en-US" sz="1700" dirty="0"/>
           </a:p>
         </p:txBody>
       </p:sp>
@@ -7346,8 +7226,8 @@
         </p:nvSpPr>
         <p:spPr>
           <a:xfrm>
-            <a:off x="548640" y="6053328"/>
-            <a:ext cx="9601200" cy="292608"/>
+            <a:off x="548640" y="6035040"/>
+            <a:ext cx="9601200" cy="310896"/>
           </a:xfrm>
           <a:prstGeom prst="rect">
             <a:avLst/>
@@ -7363,7 +7243,7 @@
               <a:buNone/>
             </a:pPr>
             <a:r>
-              <a:rPr lang="en-US" sz="1200" b="1" dirty="0">
+              <a:rPr lang="en-US" sz="1400" b="1" dirty="0">
                 <a:solidFill>
                   <a:srgbClr val="7B3A8E"/>
                 </a:solidFill>
@@ -7374,14 +7254,14 @@
               <a:buNone/>
             </a:pPr>
             <a:r>
-              <a:rPr lang="en-US" sz="1200" dirty="0">
+              <a:rPr lang="en-US" sz="1400" dirty="0">
                 <a:solidFill>
                   <a:srgbClr val="7B3A8E"/>
                 </a:solidFill>
               </a:rPr>
               <a:t>persistent   ·   bioaccumulation</a:t>
             </a:r>
-            <a:endParaRPr lang="en-US" sz="1200" dirty="0"/>
+            <a:endParaRPr lang="en-US" sz="1400" dirty="0"/>
           </a:p>
         </p:txBody>
       </p:sp>
@@ -7403,14 +7283,12 @@
           <a:ln/>
         </p:spPr>
         <p:txBody>
-          <a:bodyPr wrap="square" lIns="0" tIns="0" rIns="0" bIns="0" rtlCol="0" anchor="t">
-            <a:normAutofit/>
-          </a:bodyPr>
-          <a:lstStyle/>
-          <a:p>
-            <a:pPr marL="228600" indent="-228600">
+          <a:bodyPr wrap="square" lIns="0" tIns="0" rIns="0" bIns="0" rtlCol="0" anchor="t"/>
+          <a:lstStyle/>
+          <a:p>
+            <a:pPr marL="304800" indent="-304800">
               <a:spcAft>
-                <a:spcPts val="600"/>
+                <a:spcPts val="800"/>
               </a:spcAft>
               <a:buSzPct val="100000"/>
               <a:buChar char="•"/>
@@ -7426,9 +7304,9 @@
             <a:endParaRPr lang="en-US" sz="1700" dirty="0"/>
           </a:p>
           <a:p>
-            <a:pPr marL="228600" indent="-228600">
+            <a:pPr marL="304800" indent="-304800">
               <a:spcAft>
-                <a:spcPts val="600"/>
+                <a:spcPts val="800"/>
               </a:spcAft>
               <a:buSzPct val="100000"/>
               <a:buChar char="•"/>
@@ -7444,9 +7322,9 @@
             <a:endParaRPr lang="en-US" sz="1700" dirty="0"/>
           </a:p>
           <a:p>
-            <a:pPr marL="228600" indent="-228600">
+            <a:pPr marL="304800" indent="-304800">
               <a:spcAft>
-                <a:spcPts val="600"/>
+                <a:spcPts val="800"/>
               </a:spcAft>
               <a:buSzPct val="100000"/>
               <a:buChar char="•"/>
@@ -7462,9 +7340,9 @@
             <a:endParaRPr lang="en-US" sz="1700" dirty="0"/>
           </a:p>
           <a:p>
-            <a:pPr marL="228600" indent="-228600">
+            <a:pPr marL="304800" indent="-304800">
               <a:spcAft>
-                <a:spcPts val="600"/>
+                <a:spcPts val="800"/>
               </a:spcAft>
               <a:buSzPct val="100000"/>
               <a:buChar char="•"/>
@@ -7480,9 +7358,9 @@
             <a:endParaRPr lang="en-US" sz="1700" dirty="0"/>
           </a:p>
           <a:p>
-            <a:pPr marL="228600" indent="-228600">
+            <a:pPr marL="304800" indent="-304800">
               <a:spcAft>
-                <a:spcPts val="600"/>
+                <a:spcPts val="800"/>
               </a:spcAft>
               <a:buSzPct val="100000"/>
               <a:buChar char="•"/>
@@ -7532,7 +7410,7 @@
         <p:spPr>
           <a:xfrm>
             <a:off x="6583680" y="4831899"/>
-            <a:ext cx="5029200" cy="502920"/>
+            <a:ext cx="5029200" cy="548640"/>
           </a:xfrm>
           <a:prstGeom prst="rect">
             <a:avLst/>
@@ -7548,7 +7426,7 @@
               <a:buNone/>
             </a:pPr>
             <a:r>
-              <a:rPr lang="en-US" sz="1100" dirty="0">
+              <a:rPr lang="en-US" sz="1300" dirty="0">
                 <a:solidFill>
                   <a:srgbClr val="141B26"/>
                 </a:solidFill>
@@ -7558,21 +7436,21 @@
             <a:pPr algn="l" indent="0" marL="0">
               <a:buNone/>
             </a:pPr>
-            <a:endParaRPr lang="en-US" sz="1100" dirty="0"/>
+            <a:endParaRPr lang="en-US" sz="1300" dirty="0"/>
           </a:p>
           <a:p>
             <a:pPr algn="l" indent="0" marL="0">
               <a:buNone/>
             </a:pPr>
             <a:r>
-              <a:rPr lang="en-US" sz="800" dirty="0">
+              <a:rPr lang="en-US" sz="900" dirty="0">
                 <a:solidFill>
                   <a:srgbClr val="5B6574"/>
                 </a:solidFill>
               </a:rPr>
               <a:t>Image: Gilles San Martin, CC BY-SA 2.0, via Wikimedia Commons</a:t>
             </a:r>
-            <a:endParaRPr lang="en-US" sz="1100" dirty="0"/>
+            <a:endParaRPr lang="en-US" sz="1300" dirty="0"/>
           </a:p>
         </p:txBody>
       </p:sp>
@@ -7619,16 +7497,14 @@
           <a:ln/>
         </p:spPr>
         <p:txBody>
-          <a:bodyPr wrap="square" lIns="0" tIns="0" rIns="0" bIns="0" rtlCol="0" anchor="ctr">
-            <a:normAutofit/>
-          </a:bodyPr>
+          <a:bodyPr wrap="square" lIns="0" tIns="0" rIns="0" bIns="0" rtlCol="0" anchor="ctr"/>
           <a:lstStyle/>
           <a:p>
             <a:pPr indent="0" marL="0">
               <a:buNone/>
             </a:pPr>
             <a:r>
-              <a:rPr lang="en-US" sz="1400" b="1" dirty="0">
+              <a:rPr lang="en-US" sz="1700" b="1" dirty="0">
                 <a:solidFill>
                   <a:srgbClr val="7B3A8E"/>
                 </a:solidFill>
@@ -7639,14 +7515,14 @@
               <a:buNone/>
             </a:pPr>
             <a:r>
-              <a:rPr lang="en-US" sz="1400" dirty="0">
+              <a:rPr lang="en-US" sz="1700" dirty="0">
                 <a:solidFill>
                   <a:srgbClr val="141B26"/>
                 </a:solidFill>
               </a:rPr>
               <a:t>A persistent pesticide does not stay where it was sprayed: it travels up the food chain.</a:t>
             </a:r>
-            <a:endParaRPr lang="en-US" sz="1400" dirty="0"/>
+            <a:endParaRPr lang="en-US" sz="1700" dirty="0"/>
           </a:p>
         </p:txBody>
       </p:sp>
@@ -7829,8 +7705,8 @@
         </p:nvSpPr>
         <p:spPr>
           <a:xfrm>
-            <a:off x="548640" y="6053328"/>
-            <a:ext cx="9601200" cy="292608"/>
+            <a:off x="548640" y="6035040"/>
+            <a:ext cx="9601200" cy="310896"/>
           </a:xfrm>
           <a:prstGeom prst="rect">
             <a:avLst/>
@@ -7846,7 +7722,7 @@
               <a:buNone/>
             </a:pPr>
             <a:r>
-              <a:rPr lang="en-US" sz="1200" b="1" dirty="0">
+              <a:rPr lang="en-US" sz="1400" b="1" dirty="0">
                 <a:solidFill>
                   <a:srgbClr val="7B3A8E"/>
                 </a:solidFill>
@@ -7857,14 +7733,14 @@
               <a:buNone/>
             </a:pPr>
             <a:r>
-              <a:rPr lang="en-US" sz="1200" dirty="0">
+              <a:rPr lang="en-US" sz="1400" dirty="0">
                 <a:solidFill>
                   <a:srgbClr val="7B3A8E"/>
                 </a:solidFill>
               </a:rPr>
               <a:t>food web</a:t>
             </a:r>
-            <a:endParaRPr lang="en-US" sz="1200" dirty="0"/>
+            <a:endParaRPr lang="en-US" sz="1400" dirty="0"/>
           </a:p>
         </p:txBody>
       </p:sp>
@@ -7893,14 +7769,14 @@
               <a:buNone/>
             </a:pPr>
             <a:r>
-              <a:rPr lang="en-US" sz="1600" dirty="0">
+              <a:rPr lang="en-US" sz="1500" dirty="0">
                 <a:solidFill>
                   <a:srgbClr val="141B26"/>
                 </a:solidFill>
               </a:rPr>
               <a:t>What happens to each population if the farmer sprays the wheat with a general insecticide? With a selective herbicide?</a:t>
             </a:r>
-            <a:endParaRPr lang="en-US" sz="1600" dirty="0"/>
+            <a:endParaRPr lang="en-US" sz="1500" dirty="0"/>
           </a:p>
         </p:txBody>
       </p:sp>
@@ -7971,16 +7847,14 @@
           <a:ln/>
         </p:spPr>
         <p:txBody>
-          <a:bodyPr wrap="square" lIns="0" tIns="0" rIns="0" bIns="0" rtlCol="0" anchor="ctr">
-            <a:normAutofit/>
-          </a:bodyPr>
+          <a:bodyPr wrap="square" lIns="0" tIns="0" rIns="0" bIns="0" rtlCol="0" anchor="ctr"/>
           <a:lstStyle/>
           <a:p>
             <a:pPr indent="0" marL="0">
               <a:buNone/>
             </a:pPr>
             <a:r>
-              <a:rPr lang="en-US" sz="1400" b="1" dirty="0">
+              <a:rPr lang="en-US" sz="1700" b="1" dirty="0">
                 <a:solidFill>
                   <a:srgbClr val="7B3A8E"/>
                 </a:solidFill>
@@ -7991,14 +7865,14 @@
               <a:buNone/>
             </a:pPr>
             <a:r>
-              <a:rPr lang="en-US" sz="1400" dirty="0">
+              <a:rPr lang="en-US" sz="1700" dirty="0">
                 <a:solidFill>
                   <a:srgbClr val="141B26"/>
                 </a:solidFill>
               </a:rPr>
               <a:t>Remove one link in a food web and the effects spread to organisms that were never sprayed.</a:t>
             </a:r>
-            <a:endParaRPr lang="en-US" sz="1400" dirty="0"/>
+            <a:endParaRPr lang="en-US" sz="1700" dirty="0"/>
           </a:p>
         </p:txBody>
       </p:sp>
@@ -8181,8 +8055,8 @@
         </p:nvSpPr>
         <p:spPr>
           <a:xfrm>
-            <a:off x="548640" y="6053328"/>
-            <a:ext cx="9601200" cy="292608"/>
+            <a:off x="548640" y="6035040"/>
+            <a:ext cx="9601200" cy="310896"/>
           </a:xfrm>
           <a:prstGeom prst="rect">
             <a:avLst/>
@@ -8198,7 +8072,7 @@
               <a:buNone/>
             </a:pPr>
             <a:r>
-              <a:rPr lang="en-US" sz="1200" b="1" dirty="0">
+              <a:rPr lang="en-US" sz="1400" b="1" dirty="0">
                 <a:solidFill>
                   <a:srgbClr val="7B3A8E"/>
                 </a:solidFill>
@@ -8209,14 +8083,14 @@
               <a:buNone/>
             </a:pPr>
             <a:r>
-              <a:rPr lang="en-US" sz="1200" dirty="0">
+              <a:rPr lang="en-US" sz="1400" dirty="0">
                 <a:solidFill>
                   <a:srgbClr val="7B3A8E"/>
                 </a:solidFill>
               </a:rPr>
               <a:t>habitat   ·   biodiversity</a:t>
             </a:r>
-            <a:endParaRPr lang="en-US" sz="1200" dirty="0"/>
+            <a:endParaRPr lang="en-US" sz="1400" dirty="0"/>
           </a:p>
         </p:txBody>
       </p:sp>
@@ -8238,81 +8112,79 @@
           <a:ln/>
         </p:spPr>
         <p:txBody>
-          <a:bodyPr wrap="square" lIns="0" tIns="0" rIns="0" bIns="0" rtlCol="0" anchor="t">
-            <a:normAutofit/>
-          </a:bodyPr>
-          <a:lstStyle/>
-          <a:p>
-            <a:pPr marL="228600" indent="-228600">
+          <a:bodyPr wrap="square" lIns="0" tIns="0" rIns="0" bIns="0" rtlCol="0" anchor="t"/>
+          <a:lstStyle/>
+          <a:p>
+            <a:pPr marL="304800" indent="-304800">
               <a:spcAft>
-                <a:spcPts val="600"/>
+                <a:spcPts val="800"/>
               </a:spcAft>
               <a:buSzPct val="100000"/>
               <a:buChar char="•"/>
             </a:pPr>
             <a:r>
-              <a:rPr lang="en-US" sz="1700" dirty="0">
+              <a:rPr lang="en-US" sz="1800" dirty="0">
                 <a:solidFill>
                   <a:srgbClr val="141B26"/>
                 </a:solidFill>
               </a:rPr>
               <a:t>Clearing land for crops or machines destroys habitats, so populations of wild organisms fall.</a:t>
             </a:r>
-            <a:endParaRPr lang="en-US" sz="1700" dirty="0"/>
-          </a:p>
-          <a:p>
-            <a:pPr marL="228600" indent="-228600">
+            <a:endParaRPr lang="en-US" sz="1800" dirty="0"/>
+          </a:p>
+          <a:p>
+            <a:pPr marL="304800" indent="-304800">
               <a:spcAft>
-                <a:spcPts val="600"/>
+                <a:spcPts val="800"/>
               </a:spcAft>
               <a:buSzPct val="100000"/>
               <a:buChar char="•"/>
             </a:pPr>
             <a:r>
-              <a:rPr lang="en-US" sz="1700" dirty="0">
+              <a:rPr lang="en-US" sz="1800" dirty="0">
                 <a:solidFill>
                   <a:srgbClr val="141B26"/>
                 </a:solidFill>
               </a:rPr>
               <a:t>Farmers often plant one variety over a huge area. All the plants are identical, so if one gets a disease, all of them do.</a:t>
             </a:r>
-            <a:endParaRPr lang="en-US" sz="1700" dirty="0"/>
-          </a:p>
-          <a:p>
-            <a:pPr marL="228600" indent="-228600">
+            <a:endParaRPr lang="en-US" sz="1800" dirty="0"/>
+          </a:p>
+          <a:p>
+            <a:pPr marL="304800" indent="-304800">
               <a:spcAft>
-                <a:spcPts val="600"/>
+                <a:spcPts val="800"/>
               </a:spcAft>
               <a:buSzPct val="100000"/>
               <a:buChar char="•"/>
             </a:pPr>
             <a:r>
-              <a:rPr lang="en-US" sz="1700" dirty="0">
+              <a:rPr lang="en-US" sz="1800" dirty="0">
                 <a:solidFill>
                   <a:srgbClr val="141B26"/>
                 </a:solidFill>
               </a:rPr>
               <a:t>In 19th century Ireland most people lived on one potato variety. Between 1845 and 1852 a disease wiped it out and over a million people starved.</a:t>
             </a:r>
-            <a:endParaRPr lang="en-US" sz="1700" dirty="0"/>
-          </a:p>
-          <a:p>
-            <a:pPr marL="228600" indent="-228600">
+            <a:endParaRPr lang="en-US" sz="1800" dirty="0"/>
+          </a:p>
+          <a:p>
+            <a:pPr marL="304800" indent="-304800">
               <a:spcAft>
-                <a:spcPts val="600"/>
+                <a:spcPts val="800"/>
               </a:spcAft>
               <a:buSzPct val="100000"/>
               <a:buChar char="•"/>
             </a:pPr>
             <a:r>
-              <a:rPr lang="en-US" sz="1700" dirty="0">
+              <a:rPr lang="en-US" sz="1800" dirty="0">
                 <a:solidFill>
                   <a:srgbClr val="141B26"/>
                 </a:solidFill>
               </a:rPr>
               <a:t>A single variety reduces biodiversity: the food webs are smaller and the area takes longer to recover after a disaster.</a:t>
             </a:r>
-            <a:endParaRPr lang="en-US" sz="1700" dirty="0"/>
+            <a:endParaRPr lang="en-US" sz="1800" dirty="0"/>
           </a:p>
         </p:txBody>
       </p:sp>
@@ -8349,7 +8221,7 @@
         <p:spPr>
           <a:xfrm>
             <a:off x="6583680" y="4983480"/>
-            <a:ext cx="5029200" cy="502920"/>
+            <a:ext cx="5029200" cy="548640"/>
           </a:xfrm>
           <a:prstGeom prst="rect">
             <a:avLst/>
@@ -8365,7 +8237,7 @@
               <a:buNone/>
             </a:pPr>
             <a:r>
-              <a:rPr lang="en-US" sz="1100" dirty="0">
+              <a:rPr lang="en-US" sz="1300" dirty="0">
                 <a:solidFill>
                   <a:srgbClr val="141B26"/>
                 </a:solidFill>
@@ -8375,21 +8247,21 @@
             <a:pPr algn="l" indent="0" marL="0">
               <a:buNone/>
             </a:pPr>
-            <a:endParaRPr lang="en-US" sz="1100" dirty="0"/>
+            <a:endParaRPr lang="en-US" sz="1300" dirty="0"/>
           </a:p>
           <a:p>
             <a:pPr algn="l" indent="0" marL="0">
               <a:buNone/>
             </a:pPr>
             <a:r>
-              <a:rPr lang="en-US" sz="800" dirty="0">
+              <a:rPr lang="en-US" sz="900" dirty="0">
                 <a:solidFill>
                   <a:srgbClr val="5B6574"/>
                 </a:solidFill>
               </a:rPr>
               <a:t>Image: crustmania, CC BY 2.0, via Wikimedia Commons</a:t>
             </a:r>
-            <a:endParaRPr lang="en-US" sz="1100" dirty="0"/>
+            <a:endParaRPr lang="en-US" sz="1300" dirty="0"/>
           </a:p>
         </p:txBody>
       </p:sp>
@@ -8436,16 +8308,14 @@
           <a:ln/>
         </p:spPr>
         <p:txBody>
-          <a:bodyPr wrap="square" lIns="0" tIns="0" rIns="0" bIns="0" rtlCol="0" anchor="ctr">
-            <a:normAutofit/>
-          </a:bodyPr>
+          <a:bodyPr wrap="square" lIns="0" tIns="0" rIns="0" bIns="0" rtlCol="0" anchor="ctr"/>
           <a:lstStyle/>
           <a:p>
             <a:pPr indent="0" marL="0">
               <a:buNone/>
             </a:pPr>
             <a:r>
-              <a:rPr lang="en-US" sz="1400" b="1" dirty="0">
+              <a:rPr lang="en-US" sz="1700" b="1" dirty="0">
                 <a:solidFill>
                   <a:srgbClr val="7B3A8E"/>
                 </a:solidFill>
@@ -8456,14 +8326,14 @@
               <a:buNone/>
             </a:pPr>
             <a:r>
-              <a:rPr lang="en-US" sz="1400" dirty="0">
+              <a:rPr lang="en-US" sz="1700" dirty="0">
                 <a:solidFill>
                   <a:srgbClr val="141B26"/>
                 </a:solidFill>
               </a:rPr>
               <a:t>Low biodiversity is fragile. One disease, one pest or one drought can take everything.</a:t>
             </a:r>
-            <a:endParaRPr lang="en-US" sz="1400" dirty="0"/>
+            <a:endParaRPr lang="en-US" sz="1700" dirty="0"/>
           </a:p>
         </p:txBody>
       </p:sp>
@@ -8646,8 +8516,8 @@
         </p:nvSpPr>
         <p:spPr>
           <a:xfrm>
-            <a:off x="548640" y="6053328"/>
-            <a:ext cx="9601200" cy="292608"/>
+            <a:off x="548640" y="6035040"/>
+            <a:ext cx="9601200" cy="310896"/>
           </a:xfrm>
           <a:prstGeom prst="rect">
             <a:avLst/>
@@ -8663,7 +8533,7 @@
               <a:buNone/>
             </a:pPr>
             <a:r>
-              <a:rPr lang="en-US" sz="1200" b="1" dirty="0">
+              <a:rPr lang="en-US" sz="1400" b="1" dirty="0">
                 <a:solidFill>
                   <a:srgbClr val="7B3A8E"/>
                 </a:solidFill>
@@ -8674,14 +8544,14 @@
               <a:buNone/>
             </a:pPr>
             <a:r>
-              <a:rPr lang="en-US" sz="1200" dirty="0">
+              <a:rPr lang="en-US" sz="1400" dirty="0">
                 <a:solidFill>
                   <a:srgbClr val="7B3A8E"/>
                 </a:solidFill>
               </a:rPr>
               <a:t>carbon cycle   ·   combustion   ·   global warming</a:t>
             </a:r>
-            <a:endParaRPr lang="en-US" sz="1200" dirty="0"/>
+            <a:endParaRPr lang="en-US" sz="1400" dirty="0"/>
           </a:p>
         </p:txBody>
       </p:sp>
@@ -8788,16 +8658,14 @@
           <a:ln/>
         </p:spPr>
         <p:txBody>
-          <a:bodyPr wrap="square" lIns="0" tIns="0" rIns="0" bIns="0" rtlCol="0" anchor="ctr">
-            <a:normAutofit/>
-          </a:bodyPr>
+          <a:bodyPr wrap="square" lIns="0" tIns="0" rIns="0" bIns="0" rtlCol="0" anchor="ctr"/>
           <a:lstStyle/>
           <a:p>
             <a:pPr indent="0" marL="0">
               <a:buNone/>
             </a:pPr>
             <a:r>
-              <a:rPr lang="en-US" sz="1400" b="1" dirty="0">
+              <a:rPr lang="en-US" sz="1700" b="1" dirty="0">
                 <a:solidFill>
                   <a:srgbClr val="7B3A8E"/>
                 </a:solidFill>
@@ -8808,14 +8676,14 @@
               <a:buNone/>
             </a:pPr>
             <a:r>
-              <a:rPr lang="en-US" sz="1400" dirty="0">
+              <a:rPr lang="en-US" sz="1700" dirty="0">
                 <a:solidFill>
                   <a:srgbClr val="141B26"/>
                 </a:solidFill>
               </a:rPr>
               <a:t>Burning fossil fuels and cutting down forests have raised carbon dioxide in the air for 200 years, which is thought to cause global warming.</a:t>
             </a:r>
-            <a:endParaRPr lang="en-US" sz="1400" dirty="0"/>
+            <a:endParaRPr lang="en-US" sz="1700" dirty="0"/>
           </a:p>
         </p:txBody>
       </p:sp>
